--- a/plots/deployment_model.pptx
+++ b/plots/deployment_model.pptx
@@ -4,14 +4,14 @@
   <p:sldMasterIdLst>
     <p:sldMasterId id="2147483648" r:id="rId1"/>
   </p:sldMasterIdLst>
+  <p:notesMasterIdLst>
+    <p:notesMasterId r:id="rId3"/>
+  </p:notesMasterIdLst>
   <p:sldIdLst>
     <p:sldId id="256" r:id="rId2"/>
   </p:sldIdLst>
-  <p:notesMasterIdLst>
-    <p:notesMasterId r:id="rId3"/>
-  </p:notesMasterIdLst>
-  <p:sldSz cx="12188952" cy="5074920"/>
-  <p:notesSz cx="5074920" cy="12188952"/>
+  <p:sldSz cx="12188825" cy="5075238"/>
+  <p:notesSz cx="5075238" cy="12188825"/>
   <p:defaultTextStyle>
     <a:lvl1pPr marL="0" algn="l" defTabSz="914400" rtl="0" eaLnBrk="1" latinLnBrk="0" hangingPunct="1">
       <a:defRPr sz="1800" kern="1200">
@@ -104,6 +104,11 @@
       </a:defRPr>
     </a:lvl9pPr>
   </p:defaultTextStyle>
+  <p:extLst>
+    <p:ext uri="{EFAFB233-063F-42B5-8137-9DF3F51BA10A}">
+      <p15:sldGuideLst xmlns:p15="http://schemas.microsoft.com/office/powerpoint/2012/main"/>
+    </p:ext>
+  </p:extLst>
 </p:presentation>
 </file>
 
@@ -129,234 +134,10 @@
           <a:chExt cx="0" cy="0"/>
         </a:xfrm>
       </p:grpSpPr>
-      <p:sp>
-        <p:nvSpPr>
-          <p:cNvPr id="2" name="Header Placeholder 1"/>
-          <p:cNvSpPr>
-            <a:spLocks noGrp="1"/>
-          </p:cNvSpPr>
-          <p:nvPr>
-            <p:ph type="hdr" sz="quarter"/>
-          </p:nvPr>
-        </p:nvSpPr>
-        <p:spPr>
-          <a:xfrm>
-            <a:off x="0" y="0"/>
-            <a:ext cx="2971800" cy="458788"/>
-          </a:xfrm>
-          <a:prstGeom prst="rect">
-            <a:avLst/>
-          </a:prstGeom>
-        </p:spPr>
-        <p:txBody>
-          <a:bodyPr vert="horz" lIns="91440" tIns="45720" rIns="91440" bIns="45720" rtlCol="0"/>
-          <a:lstStyle>
-            <a:lvl1pPr algn="l">
-              <a:defRPr sz="1200"/>
-            </a:lvl1pPr>
-          </a:lstStyle>
-          <a:p>
-            <a:endParaRPr lang="en-US"/>
-          </a:p>
-        </p:txBody>
-      </p:sp>
-      <p:sp>
-        <p:nvSpPr>
-          <p:cNvPr id="3" name="Date Placeholder 2"/>
-          <p:cNvSpPr>
-            <a:spLocks noGrp="1"/>
-          </p:cNvSpPr>
-          <p:nvPr>
-            <p:ph type="dt" idx="1"/>
-          </p:nvPr>
-        </p:nvSpPr>
-        <p:spPr>
-          <a:xfrm>
-            <a:off x="3884613" y="0"/>
-            <a:ext cx="2971800" cy="458788"/>
-          </a:xfrm>
-          <a:prstGeom prst="rect">
-            <a:avLst/>
-          </a:prstGeom>
-        </p:spPr>
-        <p:txBody>
-          <a:bodyPr vert="horz" lIns="91440" tIns="45720" rIns="91440" bIns="45720" rtlCol="0"/>
-          <a:lstStyle>
-            <a:lvl1pPr algn="r">
-              <a:defRPr sz="1200"/>
-            </a:lvl1pPr>
-          </a:lstStyle>
-          <a:p>
-            <a:fld id="{5282F153-3F37-0F45-9E97-73ACFA13230C}" type="datetimeFigureOut">
-              <a:rPr lang="en-US"/>
-              <a:t>7/23/19</a:t>
-            </a:fld>
-            <a:endParaRPr lang="en-US"/>
-          </a:p>
-        </p:txBody>
-      </p:sp>
-      <p:sp>
-        <p:nvSpPr>
-          <p:cNvPr id="4" name="Slide Image Placeholder 3"/>
-          <p:cNvSpPr>
-            <a:spLocks noGrp="1" noRot="1" noChangeAspect="1"/>
-          </p:cNvSpPr>
-          <p:nvPr>
-            <p:ph type="sldImg" idx="2"/>
-          </p:nvPr>
-        </p:nvSpPr>
-        <p:spPr>
-          <a:xfrm>
-            <a:off x="685800" y="1143000"/>
-            <a:ext cx="5486400" cy="3086100"/>
-          </a:xfrm>
-          <a:prstGeom prst="rect">
-            <a:avLst/>
-          </a:prstGeom>
-          <a:noFill/>
-          <a:ln w="12700">
-            <a:solidFill>
-              <a:prstClr val="black"/>
-            </a:solidFill>
-          </a:ln>
-        </p:spPr>
-        <p:txBody>
-          <a:bodyPr vert="horz" lIns="91440" tIns="45720" rIns="91440" bIns="45720" rtlCol="0" anchor="ctr"/>
-          <a:lstStyle/>
-          <a:p>
-            <a:endParaRPr lang="en-US"/>
-          </a:p>
-        </p:txBody>
-      </p:sp>
-      <p:sp>
-        <p:nvSpPr>
-          <p:cNvPr id="5" name="Notes Placeholder 4"/>
-          <p:cNvSpPr>
-            <a:spLocks noGrp="1"/>
-          </p:cNvSpPr>
-          <p:nvPr>
-            <p:ph type="body" sz="quarter" idx="3"/>
-          </p:nvPr>
-        </p:nvSpPr>
-        <p:spPr>
-          <a:xfrm>
-            <a:off x="685800" y="4400550"/>
-            <a:ext cx="5486400" cy="3600450"/>
-          </a:xfrm>
-          <a:prstGeom prst="rect">
-            <a:avLst/>
-          </a:prstGeom>
-        </p:spPr>
-        <p:txBody>
-          <a:bodyPr vert="horz" lIns="91440" tIns="45720" rIns="91440" bIns="45720" rtlCol="0"/>
-          <a:lstStyle/>
-          <a:p>
-            <a:pPr lvl="0"/>
-            <a:r>
-              <a:rPr lang="en-US"/>
-              <a:t>Click to edit Master text styles</a:t>
-            </a:r>
-          </a:p>
-          <a:p>
-            <a:pPr lvl="1"/>
-            <a:r>
-              <a:rPr lang="en-US"/>
-              <a:t>Second level</a:t>
-            </a:r>
-          </a:p>
-          <a:p>
-            <a:pPr lvl="2"/>
-            <a:r>
-              <a:rPr lang="en-US"/>
-              <a:t>Third level</a:t>
-            </a:r>
-          </a:p>
-          <a:p>
-            <a:pPr lvl="3"/>
-            <a:r>
-              <a:rPr lang="en-US"/>
-              <a:t>Fourth level</a:t>
-            </a:r>
-          </a:p>
-          <a:p>
-            <a:pPr lvl="4"/>
-            <a:r>
-              <a:rPr lang="en-US"/>
-              <a:t>Fifth level</a:t>
-            </a:r>
-          </a:p>
-        </p:txBody>
-      </p:sp>
-      <p:sp>
-        <p:nvSpPr>
-          <p:cNvPr id="6" name="Footer Placeholder 5"/>
-          <p:cNvSpPr>
-            <a:spLocks noGrp="1"/>
-          </p:cNvSpPr>
-          <p:nvPr>
-            <p:ph type="ftr" sz="quarter" idx="4"/>
-          </p:nvPr>
-        </p:nvSpPr>
-        <p:spPr>
-          <a:xfrm>
-            <a:off x="0" y="8685213"/>
-            <a:ext cx="2971800" cy="458787"/>
-          </a:xfrm>
-          <a:prstGeom prst="rect">
-            <a:avLst/>
-          </a:prstGeom>
-        </p:spPr>
-        <p:txBody>
-          <a:bodyPr vert="horz" lIns="91440" tIns="45720" rIns="91440" bIns="45720" rtlCol="0" anchor="b"/>
-          <a:lstStyle>
-            <a:lvl1pPr algn="l">
-              <a:defRPr sz="1200"/>
-            </a:lvl1pPr>
-          </a:lstStyle>
-          <a:p>
-            <a:endParaRPr lang="en-US"/>
-          </a:p>
-        </p:txBody>
-      </p:sp>
-      <p:sp>
-        <p:nvSpPr>
-          <p:cNvPr id="7" name="Slide Number Placeholder 6"/>
-          <p:cNvSpPr>
-            <a:spLocks noGrp="1"/>
-          </p:cNvSpPr>
-          <p:nvPr>
-            <p:ph type="sldNum" sz="quarter" idx="5"/>
-          </p:nvPr>
-        </p:nvSpPr>
-        <p:spPr>
-          <a:xfrm>
-            <a:off x="3884613" y="8685213"/>
-            <a:ext cx="2971800" cy="458787"/>
-          </a:xfrm>
-          <a:prstGeom prst="rect">
-            <a:avLst/>
-          </a:prstGeom>
-        </p:spPr>
-        <p:txBody>
-          <a:bodyPr vert="horz" lIns="91440" tIns="45720" rIns="91440" bIns="45720" rtlCol="0" anchor="b"/>
-          <a:lstStyle>
-            <a:lvl1pPr algn="r">
-              <a:defRPr sz="1200"/>
-            </a:lvl1pPr>
-          </a:lstStyle>
-          <a:p>
-            <a:fld id="{CE5E9CC1-C706-0F49-92D6-E571CC5EEA8F}" type="slidenum">
-              <a:rPr lang="en-US"/>
-              <a:t>‹#›</a:t>
-            </a:fld>
-            <a:endParaRPr lang="en-US"/>
-          </a:p>
-        </p:txBody>
-      </p:sp>
     </p:spTree>
     <p:extLst>
       <p:ext uri="{BB962C8B-B14F-4D97-AF65-F5344CB8AC3E}">
-        <p14:creationId xmlns:p14="http://schemas.microsoft.com/office/powerpoint/2010/main" val="1024086991"/>
+        <p14:creationId xmlns:p14="http://schemas.microsoft.com/office/powerpoint/2010/main" val="1495412124"/>
       </p:ext>
     </p:extLst>
   </p:cSld>
@@ -500,10 +281,6 @@
           <a:bodyPr/>
           <a:lstStyle/>
           <a:p>
-            <a:r>
-              <a:rPr lang="en-US" dirty="0"/>
-              <a:t/>
-            </a:r>
             <a:endParaRPr lang="en-US" dirty="0"/>
           </a:p>
         </p:txBody>
@@ -577,6 +354,11 @@
 <file path=ppt/slideMasters/slideMaster1.xml><?xml version="1.0" encoding="utf-8"?>
 <p:sldMaster xmlns:a="http://schemas.openxmlformats.org/drawingml/2006/main" xmlns:r="http://schemas.openxmlformats.org/officeDocument/2006/relationships" xmlns:p="http://schemas.openxmlformats.org/presentationml/2006/main">
   <p:cSld>
+    <p:bg>
+      <p:bgRef idx="1001">
+        <a:schemeClr val="bg1"/>
+      </p:bgRef>
+    </p:bg>
     <p:spTree>
       <p:nvGrpSpPr>
         <p:cNvPr id="1" name=""/>
@@ -859,6 +641,7 @@
         <a:solidFill>
           <a:srgbClr val="FFFFFF"/>
         </a:solidFill>
+        <a:effectLst/>
       </p:bgPr>
     </p:bg>
     <p:spTree>
@@ -883,8 +666,8 @@
         </p:nvSpPr>
         <p:spPr>
           <a:xfrm>
-            <a:off x="411480" y="1920240"/>
-            <a:ext cx="5394960" cy="1737360"/>
+            <a:off x="109728" y="1690422"/>
+            <a:ext cx="5663134" cy="1823721"/>
           </a:xfrm>
           <a:prstGeom prst="ellipse">
             <a:avLst/>
@@ -892,13 +675,20 @@
           <a:solidFill>
             <a:srgbClr val="F2F5F1"/>
           </a:solidFill>
-          <a:ln w="12700">
+          <a:ln w="13331">
             <a:solidFill>
               <a:srgbClr val="BFCBBF"/>
             </a:solidFill>
             <a:prstDash val="dash"/>
           </a:ln>
         </p:spPr>
+        <p:txBody>
+          <a:bodyPr/>
+          <a:lstStyle/>
+          <a:p>
+            <a:endParaRPr lang="en-US"/>
+          </a:p>
+        </p:txBody>
       </p:sp>
       <p:sp>
         <p:nvSpPr>
@@ -908,8 +698,8 @@
         </p:nvSpPr>
         <p:spPr>
           <a:xfrm>
-            <a:off x="5806440" y="1920240"/>
-            <a:ext cx="5394960" cy="1737360"/>
+            <a:off x="5772862" y="1690422"/>
+            <a:ext cx="5663134" cy="1823721"/>
           </a:xfrm>
           <a:prstGeom prst="ellipse">
             <a:avLst/>
@@ -917,127 +707,24 @@
           <a:solidFill>
             <a:srgbClr val="F2F5F1"/>
           </a:solidFill>
-          <a:ln w="12700">
+          <a:ln w="13331">
             <a:solidFill>
               <a:srgbClr val="BFCBBF"/>
             </a:solidFill>
             <a:prstDash val="dash"/>
           </a:ln>
         </p:spPr>
-      </p:sp>
-      <p:sp>
-        <p:nvSpPr>
-          <p:cNvPr id="4" name="Shape 2"/>
-          <p:cNvSpPr/>
-          <p:nvPr/>
-        </p:nvSpPr>
-        <p:spPr>
-          <a:xfrm>
-            <a:off x="5806440" y="1874520"/>
-            <a:ext cx="0" cy="1801368"/>
-          </a:xfrm>
-          <a:prstGeom prst="line">
-            <a:avLst/>
-          </a:prstGeom>
-          <a:noFill/>
-          <a:ln w="12700">
-            <a:solidFill>
-              <a:srgbClr val="9A9A9A"/>
-            </a:solidFill>
-            <a:prstDash val="sysDot"/>
-          </a:ln>
-        </p:spPr>
-      </p:sp>
-      <p:sp>
-        <p:nvSpPr>
-          <p:cNvPr id="5" name="Text 3"/>
-          <p:cNvSpPr/>
-          <p:nvPr/>
-        </p:nvSpPr>
-        <p:spPr>
-          <a:xfrm>
-            <a:off x="5349240" y="3694176"/>
-            <a:ext cx="914400" cy="164592"/>
-          </a:xfrm>
-          <a:prstGeom prst="rect">
-            <a:avLst/>
-          </a:prstGeom>
-          <a:noFill/>
-          <a:ln/>
-        </p:spPr>
-        <p:txBody>
-          <a:bodyPr wrap="square" lIns="0" tIns="0" rIns="0" bIns="0" rtlCol="0" anchor="ctr"/>
-          <a:lstStyle/>
-          <a:p>
-            <a:pPr algn="ctr" indent="0" marL="0">
-              <a:buNone/>
-            </a:pPr>
-            <a:r>
-              <a:rPr lang="en-US" sz="900" i="1" dirty="0">
-                <a:solidFill>
-                  <a:srgbClr val="5A5A5A"/>
-                </a:solidFill>
-                <a:latin typeface="Times New Roman" pitchFamily="34" charset="0"/>
-                <a:ea typeface="Times New Roman" pitchFamily="34" charset="-122"/>
-                <a:cs typeface="Times New Roman" pitchFamily="34" charset="-120"/>
-              </a:rPr>
-              <a:t>cell boundary</a:t>
-            </a:r>
-            <a:endParaRPr lang="en-US" sz="900" dirty="0"/>
+        <p:txBody>
+          <a:bodyPr/>
+          <a:lstStyle/>
+          <a:p>
+            <a:endParaRPr lang="en-US"/>
           </a:p>
         </p:txBody>
       </p:sp>
       <p:pic>
         <p:nvPicPr>
-          <p:cNvPr id="6" name="Image 0" descr="preencoded.png">    </p:cNvPr>
-          <p:cNvPicPr>
-            <a:picLocks noChangeAspect="1"/>
-          </p:cNvPicPr>
-          <p:nvPr/>
-        </p:nvPicPr>
-        <p:blipFill>
-          <a:blip r:embed="rId1"/>
-          <a:stretch>
-            <a:fillRect/>
-          </a:stretch>
-        </p:blipFill>
-        <p:spPr>
-          <a:xfrm>
-            <a:off x="512064" y="2532888"/>
-            <a:ext cx="347472" cy="347472"/>
-          </a:xfrm>
-          <a:prstGeom prst="rect">
-            <a:avLst/>
-          </a:prstGeom>
-        </p:spPr>
-      </p:pic>
-      <p:pic>
-        <p:nvPicPr>
-          <p:cNvPr id="7" name="Image 1" descr="preencoded.png">    </p:cNvPr>
-          <p:cNvPicPr>
-            <a:picLocks noChangeAspect="1"/>
-          </p:cNvPicPr>
-          <p:nvPr/>
-        </p:nvPicPr>
-        <p:blipFill>
-          <a:blip r:embed="rId2"/>
-          <a:stretch>
-            <a:fillRect/>
-          </a:stretch>
-        </p:blipFill>
-        <p:spPr>
-          <a:xfrm>
-            <a:off x="2255514" y="3108960"/>
-            <a:ext cx="243852" cy="365760"/>
-          </a:xfrm>
-          <a:prstGeom prst="rect">
-            <a:avLst/>
-          </a:prstGeom>
-        </p:spPr>
-      </p:pic>
-      <p:pic>
-        <p:nvPicPr>
-          <p:cNvPr id="8" name="Image 2" descr="preencoded.png">    </p:cNvPr>
+          <p:cNvPr id="6" name="Image 0" descr="preencoded.png"/>
           <p:cNvPicPr>
             <a:picLocks noChangeAspect="1"/>
           </p:cNvPicPr>
@@ -1051,8 +738,8 @@
         </p:blipFill>
         <p:spPr>
           <a:xfrm>
-            <a:off x="3949475" y="2889504"/>
-            <a:ext cx="422091" cy="402336"/>
+            <a:off x="215312" y="2333523"/>
+            <a:ext cx="364744" cy="364744"/>
           </a:xfrm>
           <a:prstGeom prst="rect">
             <a:avLst/>
@@ -1061,7 +748,7 @@
       </p:pic>
       <p:pic>
         <p:nvPicPr>
-          <p:cNvPr id="9" name="Image 3" descr="preencoded.png">    </p:cNvPr>
+          <p:cNvPr id="7" name="Image 1" descr="preencoded.png"/>
           <p:cNvPicPr>
             <a:picLocks noChangeAspect="1"/>
           </p:cNvPicPr>
@@ -1075,8 +762,8 @@
         </p:blipFill>
         <p:spPr>
           <a:xfrm>
-            <a:off x="3758650" y="2724912"/>
-            <a:ext cx="163659" cy="274320"/>
+            <a:off x="2045426" y="2938231"/>
+            <a:ext cx="255973" cy="383941"/>
           </a:xfrm>
           <a:prstGeom prst="rect">
             <a:avLst/>
@@ -1085,7 +772,7 @@
       </p:pic>
       <p:pic>
         <p:nvPicPr>
-          <p:cNvPr id="10" name="Image 4" descr="preencoded.png">    </p:cNvPr>
+          <p:cNvPr id="8" name="Image 2" descr="preencoded.png"/>
           <p:cNvPicPr>
             <a:picLocks noChangeAspect="1"/>
           </p:cNvPicPr>
@@ -1099,8 +786,8 @@
         </p:blipFill>
         <p:spPr>
           <a:xfrm>
-            <a:off x="7195595" y="2907792"/>
-            <a:ext cx="422091" cy="402336"/>
+            <a:off x="3823590" y="2707866"/>
+            <a:ext cx="443072" cy="422335"/>
           </a:xfrm>
           <a:prstGeom prst="rect">
             <a:avLst/>
@@ -1109,7 +796,7 @@
       </p:pic>
       <p:pic>
         <p:nvPicPr>
-          <p:cNvPr id="11" name="Image 5" descr="preencoded.png">    </p:cNvPr>
+          <p:cNvPr id="9" name="Image 3" descr="preencoded.png"/>
           <p:cNvPicPr>
             <a:picLocks noChangeAspect="1"/>
           </p:cNvPicPr>
@@ -1123,8 +810,8 @@
         </p:blipFill>
         <p:spPr>
           <a:xfrm>
-            <a:off x="8833570" y="3246120"/>
-            <a:ext cx="163659" cy="274320"/>
+            <a:off x="3623280" y="2535092"/>
+            <a:ext cx="171794" cy="287956"/>
           </a:xfrm>
           <a:prstGeom prst="rect">
             <a:avLst/>
@@ -1133,7 +820,127 @@
       </p:pic>
       <p:pic>
         <p:nvPicPr>
-          <p:cNvPr id="12" name="Image 6" descr="preencoded.png">    </p:cNvPr>
+          <p:cNvPr id="10" name="Image 4" descr="preencoded.png"/>
+          <p:cNvPicPr>
+            <a:picLocks noChangeAspect="1"/>
+          </p:cNvPicPr>
+          <p:nvPr/>
+        </p:nvPicPr>
+        <p:blipFill>
+          <a:blip r:embed="rId5"/>
+          <a:stretch>
+            <a:fillRect/>
+          </a:stretch>
+        </p:blipFill>
+        <p:spPr>
+          <a:xfrm>
+            <a:off x="7231069" y="2727063"/>
+            <a:ext cx="443072" cy="422335"/>
+          </a:xfrm>
+          <a:prstGeom prst="rect">
+            <a:avLst/>
+          </a:prstGeom>
+        </p:spPr>
+      </p:pic>
+      <p:pic>
+        <p:nvPicPr>
+          <p:cNvPr id="11" name="Image 5" descr="preencoded.png"/>
+          <p:cNvPicPr>
+            <a:picLocks noChangeAspect="1"/>
+          </p:cNvPicPr>
+          <p:nvPr/>
+        </p:nvPicPr>
+        <p:blipFill>
+          <a:blip r:embed="rId6"/>
+          <a:stretch>
+            <a:fillRect/>
+          </a:stretch>
+        </p:blipFill>
+        <p:spPr>
+          <a:xfrm>
+            <a:off x="8950465" y="3082209"/>
+            <a:ext cx="171794" cy="287956"/>
+          </a:xfrm>
+          <a:prstGeom prst="rect">
+            <a:avLst/>
+          </a:prstGeom>
+        </p:spPr>
+      </p:pic>
+      <p:pic>
+        <p:nvPicPr>
+          <p:cNvPr id="12" name="Image 6" descr="preencoded.png"/>
+          <p:cNvPicPr>
+            <a:picLocks noChangeAspect="1"/>
+          </p:cNvPicPr>
+          <p:nvPr/>
+        </p:nvPicPr>
+        <p:blipFill>
+          <a:blip r:embed="rId4"/>
+          <a:stretch>
+            <a:fillRect/>
+          </a:stretch>
+        </p:blipFill>
+        <p:spPr>
+          <a:xfrm>
+            <a:off x="9868229" y="2650275"/>
+            <a:ext cx="255973" cy="383941"/>
+          </a:xfrm>
+          <a:prstGeom prst="rect">
+            <a:avLst/>
+          </a:prstGeom>
+        </p:spPr>
+      </p:pic>
+      <p:pic>
+        <p:nvPicPr>
+          <p:cNvPr id="13" name="Image 7" descr="preencoded.png"/>
+          <p:cNvPicPr>
+            <a:picLocks noChangeAspect="1"/>
+          </p:cNvPicPr>
+          <p:nvPr/>
+        </p:nvPicPr>
+        <p:blipFill>
+          <a:blip r:embed="rId3"/>
+          <a:stretch>
+            <a:fillRect/>
+          </a:stretch>
+        </p:blipFill>
+        <p:spPr>
+          <a:xfrm>
+            <a:off x="10869682" y="2429509"/>
+            <a:ext cx="364744" cy="364744"/>
+          </a:xfrm>
+          <a:prstGeom prst="rect">
+            <a:avLst/>
+          </a:prstGeom>
+        </p:spPr>
+      </p:pic>
+      <p:pic>
+        <p:nvPicPr>
+          <p:cNvPr id="14" name="Image 8" descr="preencoded.png"/>
+          <p:cNvPicPr>
+            <a:picLocks noChangeAspect="1"/>
+          </p:cNvPicPr>
+          <p:nvPr/>
+        </p:nvPicPr>
+        <p:blipFill>
+          <a:blip r:embed="rId5"/>
+          <a:stretch>
+            <a:fillRect/>
+          </a:stretch>
+        </p:blipFill>
+        <p:spPr>
+          <a:xfrm>
+            <a:off x="9352816" y="1882392"/>
+            <a:ext cx="422933" cy="403138"/>
+          </a:xfrm>
+          <a:prstGeom prst="rect">
+            <a:avLst/>
+          </a:prstGeom>
+        </p:spPr>
+      </p:pic>
+      <p:pic>
+        <p:nvPicPr>
+          <p:cNvPr id="15" name="Image 9" descr="preencoded.png"/>
           <p:cNvPicPr>
             <a:picLocks noChangeAspect="1"/>
           </p:cNvPicPr>
@@ -1147,17 +954,317 @@
         </p:blipFill>
         <p:spPr>
           <a:xfrm>
-            <a:off x="9707874" y="2834640"/>
-            <a:ext cx="243852" cy="365760"/>
+            <a:off x="9445914" y="1632830"/>
+            <a:ext cx="236734" cy="249562"/>
           </a:xfrm>
           <a:prstGeom prst="rect">
             <a:avLst/>
           </a:prstGeom>
         </p:spPr>
       </p:pic>
+      <p:sp>
+        <p:nvSpPr>
+          <p:cNvPr id="16" name="Shape 4"/>
+          <p:cNvSpPr/>
+          <p:nvPr/>
+        </p:nvSpPr>
+        <p:spPr>
+          <a:xfrm rot="3267739">
+            <a:off x="2276596" y="1213191"/>
+            <a:ext cx="220766" cy="1362399"/>
+          </a:xfrm>
+          <a:prstGeom prst="triangle">
+            <a:avLst/>
+          </a:prstGeom>
+          <a:solidFill>
+            <a:srgbClr val="8A8A8A">
+              <a:alpha val="38000"/>
+            </a:srgbClr>
+          </a:solidFill>
+          <a:ln w="9998">
+            <a:solidFill>
+              <a:srgbClr val="8A8A8A">
+                <a:alpha val="75000"/>
+              </a:srgbClr>
+            </a:solidFill>
+            <a:prstDash val="solid"/>
+          </a:ln>
+        </p:spPr>
+        <p:txBody>
+          <a:bodyPr/>
+          <a:lstStyle/>
+          <a:p>
+            <a:endParaRPr lang="en-US"/>
+          </a:p>
+        </p:txBody>
+      </p:sp>
+      <p:sp>
+        <p:nvSpPr>
+          <p:cNvPr id="17" name="Shape 5"/>
+          <p:cNvSpPr/>
+          <p:nvPr/>
+        </p:nvSpPr>
+        <p:spPr>
+          <a:xfrm>
+            <a:off x="1611898" y="2299928"/>
+            <a:ext cx="163175" cy="163175"/>
+          </a:xfrm>
+          <a:prstGeom prst="line">
+            <a:avLst/>
+          </a:prstGeom>
+          <a:noFill/>
+          <a:ln w="33328">
+            <a:solidFill>
+              <a:srgbClr val="8A8A8A"/>
+            </a:solidFill>
+            <a:prstDash val="solid"/>
+          </a:ln>
+        </p:spPr>
+        <p:txBody>
+          <a:bodyPr/>
+          <a:lstStyle/>
+          <a:p>
+            <a:endParaRPr lang="en-US"/>
+          </a:p>
+        </p:txBody>
+      </p:sp>
+      <p:sp>
+        <p:nvSpPr>
+          <p:cNvPr id="18" name="Shape 6"/>
+          <p:cNvSpPr/>
+          <p:nvPr/>
+        </p:nvSpPr>
+        <p:spPr>
+          <a:xfrm flipV="1">
+            <a:off x="1611898" y="2299928"/>
+            <a:ext cx="163175" cy="163175"/>
+          </a:xfrm>
+          <a:prstGeom prst="line">
+            <a:avLst/>
+          </a:prstGeom>
+          <a:noFill/>
+          <a:ln w="33328">
+            <a:solidFill>
+              <a:srgbClr val="8A8A8A"/>
+            </a:solidFill>
+            <a:prstDash val="solid"/>
+          </a:ln>
+        </p:spPr>
+        <p:txBody>
+          <a:bodyPr/>
+          <a:lstStyle/>
+          <a:p>
+            <a:endParaRPr lang="en-US"/>
+          </a:p>
+        </p:txBody>
+      </p:sp>
+      <p:sp>
+        <p:nvSpPr>
+          <p:cNvPr id="19" name="Shape 7"/>
+          <p:cNvSpPr/>
+          <p:nvPr/>
+        </p:nvSpPr>
+        <p:spPr>
+          <a:xfrm rot="5587328">
+            <a:off x="2412416" y="1041301"/>
+            <a:ext cx="191971" cy="867075"/>
+          </a:xfrm>
+          <a:prstGeom prst="triangle">
+            <a:avLst/>
+          </a:prstGeom>
+          <a:solidFill>
+            <a:srgbClr val="338C40">
+              <a:alpha val="52000"/>
+            </a:srgbClr>
+          </a:solidFill>
+          <a:ln w="9998">
+            <a:solidFill>
+              <a:srgbClr val="338C40">
+                <a:alpha val="75000"/>
+              </a:srgbClr>
+            </a:solidFill>
+            <a:prstDash val="solid"/>
+          </a:ln>
+        </p:spPr>
+        <p:txBody>
+          <a:bodyPr/>
+          <a:lstStyle/>
+          <a:p>
+            <a:endParaRPr lang="en-US"/>
+          </a:p>
+        </p:txBody>
+      </p:sp>
+      <p:sp>
+        <p:nvSpPr>
+          <p:cNvPr id="20" name="Shape 8"/>
+          <p:cNvSpPr/>
+          <p:nvPr/>
+        </p:nvSpPr>
+        <p:spPr>
+          <a:xfrm rot="1959655">
+            <a:off x="1405530" y="1328366"/>
+            <a:ext cx="191971" cy="1422885"/>
+          </a:xfrm>
+          <a:prstGeom prst="triangle">
+            <a:avLst/>
+          </a:prstGeom>
+          <a:solidFill>
+            <a:srgbClr val="338C40">
+              <a:alpha val="52000"/>
+            </a:srgbClr>
+          </a:solidFill>
+          <a:ln w="9998">
+            <a:solidFill>
+              <a:srgbClr val="338C40">
+                <a:alpha val="75000"/>
+              </a:srgbClr>
+            </a:solidFill>
+            <a:prstDash val="solid"/>
+          </a:ln>
+        </p:spPr>
+        <p:txBody>
+          <a:bodyPr/>
+          <a:lstStyle/>
+          <a:p>
+            <a:endParaRPr lang="en-US"/>
+          </a:p>
+        </p:txBody>
+      </p:sp>
+      <p:sp>
+        <p:nvSpPr>
+          <p:cNvPr id="21" name="Shape 9"/>
+          <p:cNvSpPr/>
+          <p:nvPr/>
+        </p:nvSpPr>
+        <p:spPr>
+          <a:xfrm rot="5017031">
+            <a:off x="7177127" y="333512"/>
+            <a:ext cx="249562" cy="2621290"/>
+          </a:xfrm>
+          <a:prstGeom prst="triangle">
+            <a:avLst/>
+          </a:prstGeom>
+          <a:solidFill>
+            <a:srgbClr val="0073BA">
+              <a:alpha val="45000"/>
+            </a:srgbClr>
+          </a:solidFill>
+          <a:ln w="9998">
+            <a:solidFill>
+              <a:srgbClr val="0073BA">
+                <a:alpha val="75000"/>
+              </a:srgbClr>
+            </a:solidFill>
+            <a:prstDash val="solid"/>
+          </a:ln>
+        </p:spPr>
+        <p:txBody>
+          <a:bodyPr/>
+          <a:lstStyle/>
+          <a:p>
+            <a:endParaRPr lang="en-US"/>
+          </a:p>
+        </p:txBody>
+      </p:sp>
+      <p:sp>
+        <p:nvSpPr>
+          <p:cNvPr id="22" name="Shape 10"/>
+          <p:cNvSpPr/>
+          <p:nvPr/>
+        </p:nvSpPr>
+        <p:spPr>
+          <a:xfrm rot="-5017031">
+            <a:off x="3694300" y="713384"/>
+            <a:ext cx="249562" cy="1766521"/>
+          </a:xfrm>
+          <a:prstGeom prst="triangle">
+            <a:avLst/>
+          </a:prstGeom>
+          <a:solidFill>
+            <a:srgbClr val="B81A29">
+              <a:alpha val="42000"/>
+            </a:srgbClr>
+          </a:solidFill>
+          <a:ln w="9998">
+            <a:solidFill>
+              <a:srgbClr val="B81A29">
+                <a:alpha val="75000"/>
+              </a:srgbClr>
+            </a:solidFill>
+            <a:prstDash val="solid"/>
+          </a:ln>
+        </p:spPr>
+        <p:txBody>
+          <a:bodyPr/>
+          <a:lstStyle/>
+          <a:p>
+            <a:endParaRPr lang="en-US"/>
+          </a:p>
+        </p:txBody>
+      </p:sp>
+      <p:sp>
+        <p:nvSpPr>
+          <p:cNvPr id="23" name="Shape 11"/>
+          <p:cNvSpPr/>
+          <p:nvPr/>
+        </p:nvSpPr>
+        <p:spPr>
+          <a:xfrm>
+            <a:off x="4837005" y="1628031"/>
+            <a:ext cx="182372" cy="182372"/>
+          </a:xfrm>
+          <a:prstGeom prst="line">
+            <a:avLst/>
+          </a:prstGeom>
+          <a:noFill/>
+          <a:ln w="33328">
+            <a:solidFill>
+              <a:srgbClr val="B81A29"/>
+            </a:solidFill>
+            <a:prstDash val="solid"/>
+          </a:ln>
+        </p:spPr>
+        <p:txBody>
+          <a:bodyPr/>
+          <a:lstStyle/>
+          <a:p>
+            <a:endParaRPr lang="en-US"/>
+          </a:p>
+        </p:txBody>
+      </p:sp>
+      <p:sp>
+        <p:nvSpPr>
+          <p:cNvPr id="24" name="Shape 12"/>
+          <p:cNvSpPr/>
+          <p:nvPr/>
+        </p:nvSpPr>
+        <p:spPr>
+          <a:xfrm flipV="1">
+            <a:off x="4837005" y="1628031"/>
+            <a:ext cx="182372" cy="182372"/>
+          </a:xfrm>
+          <a:prstGeom prst="line">
+            <a:avLst/>
+          </a:prstGeom>
+          <a:noFill/>
+          <a:ln w="33328">
+            <a:solidFill>
+              <a:srgbClr val="B81A29"/>
+            </a:solidFill>
+            <a:prstDash val="solid"/>
+          </a:ln>
+        </p:spPr>
+        <p:txBody>
+          <a:bodyPr/>
+          <a:lstStyle/>
+          <a:p>
+            <a:endParaRPr lang="en-US"/>
+          </a:p>
+        </p:txBody>
+      </p:sp>
       <p:pic>
         <p:nvPicPr>
-          <p:cNvPr id="13" name="Image 7" descr="preencoded.png">    </p:cNvPr>
+          <p:cNvPr id="25" name="Image 10" descr="preencoded.png"/>
           <p:cNvPicPr>
             <a:picLocks noChangeAspect="1"/>
           </p:cNvPicPr>
@@ -1171,8 +1278,8 @@
         </p:blipFill>
         <p:spPr>
           <a:xfrm>
-            <a:off x="10661904" y="2624328"/>
-            <a:ext cx="347472" cy="347472"/>
+            <a:off x="2448597" y="1354473"/>
+            <a:ext cx="985395" cy="1247809"/>
           </a:xfrm>
           <a:prstGeom prst="rect">
             <a:avLst/>
@@ -1181,7 +1288,31 @@
       </p:pic>
       <p:pic>
         <p:nvPicPr>
-          <p:cNvPr id="14" name="Image 8" descr="preencoded.png">    </p:cNvPr>
+          <p:cNvPr id="26" name="Image 11" descr="preencoded.png"/>
+          <p:cNvPicPr>
+            <a:picLocks noChangeAspect="1"/>
+          </p:cNvPicPr>
+          <p:nvPr/>
+        </p:nvPicPr>
+        <p:blipFill>
+          <a:blip r:embed="rId8"/>
+          <a:stretch>
+            <a:fillRect/>
+          </a:stretch>
+        </p:blipFill>
+        <p:spPr>
+          <a:xfrm>
+            <a:off x="8111731" y="1354473"/>
+            <a:ext cx="985395" cy="1247809"/>
+          </a:xfrm>
+          <a:prstGeom prst="rect">
+            <a:avLst/>
+          </a:prstGeom>
+        </p:spPr>
+      </p:pic>
+      <p:pic>
+        <p:nvPicPr>
+          <p:cNvPr id="27" name="Image 12" descr="preencoded.png"/>
           <p:cNvPicPr>
             <a:picLocks noChangeAspect="1"/>
           </p:cNvPicPr>
@@ -1195,8 +1326,59 @@
         </p:blipFill>
         <p:spPr>
           <a:xfrm>
-            <a:off x="9216868" y="2103120"/>
-            <a:ext cx="402905" cy="384048"/>
+            <a:off x="1591247" y="1498451"/>
+            <a:ext cx="588419" cy="527919"/>
+          </a:xfrm>
+          <a:prstGeom prst="rect">
+            <a:avLst/>
+          </a:prstGeom>
+        </p:spPr>
+      </p:pic>
+      <p:sp>
+        <p:nvSpPr>
+          <p:cNvPr id="28" name="Shape 13"/>
+          <p:cNvSpPr/>
+          <p:nvPr/>
+        </p:nvSpPr>
+        <p:spPr>
+          <a:xfrm>
+            <a:off x="1741478" y="1354473"/>
+            <a:ext cx="287956" cy="143978"/>
+          </a:xfrm>
+          <a:prstGeom prst="rect">
+            <a:avLst/>
+          </a:prstGeom>
+          <a:solidFill>
+            <a:srgbClr val="0D2680"/>
+          </a:solidFill>
+          <a:ln/>
+        </p:spPr>
+        <p:txBody>
+          <a:bodyPr/>
+          <a:lstStyle/>
+          <a:p>
+            <a:endParaRPr lang="en-US"/>
+          </a:p>
+        </p:txBody>
+      </p:sp>
+      <p:pic>
+        <p:nvPicPr>
+          <p:cNvPr id="29" name="Image 13" descr="preencoded.png"/>
+          <p:cNvPicPr>
+            <a:picLocks noChangeAspect="1"/>
+          </p:cNvPicPr>
+          <p:nvPr/>
+        </p:nvPicPr>
+        <p:blipFill>
+          <a:blip r:embed="rId9"/>
+          <a:stretch>
+            <a:fillRect/>
+          </a:stretch>
+        </p:blipFill>
+        <p:spPr>
+          <a:xfrm>
+            <a:off x="5478653" y="1978378"/>
+            <a:ext cx="588419" cy="527919"/>
           </a:xfrm>
           <a:prstGeom prst="rect">
             <a:avLst/>
@@ -1205,7 +1387,31 @@
       </p:pic>
       <p:pic>
         <p:nvPicPr>
-          <p:cNvPr id="15" name="Image 9" descr="preencoded.png">    </p:cNvPr>
+          <p:cNvPr id="30" name="Image 14" descr="preencoded.png"/>
+          <p:cNvPicPr>
+            <a:picLocks noChangeAspect="1"/>
+          </p:cNvPicPr>
+          <p:nvPr/>
+        </p:nvPicPr>
+        <p:blipFill>
+          <a:blip r:embed="rId7"/>
+          <a:stretch>
+            <a:fillRect/>
+          </a:stretch>
+        </p:blipFill>
+        <p:spPr>
+          <a:xfrm>
+            <a:off x="5618074" y="1652028"/>
+            <a:ext cx="309576" cy="326350"/>
+          </a:xfrm>
+          <a:prstGeom prst="rect">
+            <a:avLst/>
+          </a:prstGeom>
+        </p:spPr>
+      </p:pic>
+      <p:pic>
+        <p:nvPicPr>
+          <p:cNvPr id="31" name="Image 15" descr="preencoded.png"/>
           <p:cNvPicPr>
             <a:picLocks noChangeAspect="1"/>
           </p:cNvPicPr>
@@ -1219,409 +1425,8 @@
         </p:blipFill>
         <p:spPr>
           <a:xfrm>
-            <a:off x="9305558" y="1865376"/>
-            <a:ext cx="225524" cy="237744"/>
-          </a:xfrm>
-          <a:prstGeom prst="rect">
-            <a:avLst/>
-          </a:prstGeom>
-        </p:spPr>
-      </p:pic>
-      <p:sp>
-        <p:nvSpPr>
-          <p:cNvPr id="16" name="Shape 4"/>
-          <p:cNvSpPr/>
-          <p:nvPr/>
-        </p:nvSpPr>
-        <p:spPr>
-          <a:xfrm rot="3267739">
-            <a:off x="2475738" y="1465608"/>
-            <a:ext cx="210312" cy="1297884"/>
-          </a:xfrm>
-          <a:prstGeom prst="triangle">
-            <a:avLst/>
-          </a:prstGeom>
-          <a:solidFill>
-            <a:srgbClr val="8A8A8A">
-              <a:alpha val="38000"/>
-            </a:srgbClr>
-          </a:solidFill>
-          <a:ln w="9525">
-            <a:solidFill>
-              <a:srgbClr val="8A8A8A">
-                <a:alpha val="75000"/>
-              </a:srgbClr>
-            </a:solidFill>
-            <a:prstDash val="solid"/>
-          </a:ln>
-        </p:spPr>
-      </p:sp>
-      <p:sp>
-        <p:nvSpPr>
-          <p:cNvPr id="17" name="Shape 5"/>
-          <p:cNvSpPr/>
-          <p:nvPr/>
-        </p:nvSpPr>
-        <p:spPr>
-          <a:xfrm>
-            <a:off x="1842516" y="2500884"/>
-            <a:ext cx="155448" cy="155448"/>
-          </a:xfrm>
-          <a:prstGeom prst="line">
-            <a:avLst/>
-          </a:prstGeom>
-          <a:noFill/>
-          <a:ln w="31750">
-            <a:solidFill>
-              <a:srgbClr val="8A8A8A"/>
-            </a:solidFill>
-            <a:prstDash val="solid"/>
-          </a:ln>
-        </p:spPr>
-      </p:sp>
-      <p:sp>
-        <p:nvSpPr>
-          <p:cNvPr id="18" name="Shape 6"/>
-          <p:cNvSpPr/>
-          <p:nvPr/>
-        </p:nvSpPr>
-        <p:spPr>
-          <a:xfrm flipV="1">
-            <a:off x="1842516" y="2500884"/>
-            <a:ext cx="155448" cy="155448"/>
-          </a:xfrm>
-          <a:prstGeom prst="line">
-            <a:avLst/>
-          </a:prstGeom>
-          <a:noFill/>
-          <a:ln w="31750">
-            <a:solidFill>
-              <a:srgbClr val="8A8A8A"/>
-            </a:solidFill>
-            <a:prstDash val="solid"/>
-          </a:ln>
-        </p:spPr>
-      </p:sp>
-      <p:sp>
-        <p:nvSpPr>
-          <p:cNvPr id="19" name="Shape 7"/>
-          <p:cNvSpPr/>
-          <p:nvPr/>
-        </p:nvSpPr>
-        <p:spPr>
-          <a:xfrm rot="5587328">
-            <a:off x="2605126" y="1301858"/>
-            <a:ext cx="182880" cy="826015"/>
-          </a:xfrm>
-          <a:prstGeom prst="triangle">
-            <a:avLst/>
-          </a:prstGeom>
-          <a:solidFill>
-            <a:srgbClr val="338C40">
-              <a:alpha val="52000"/>
-            </a:srgbClr>
-          </a:solidFill>
-          <a:ln w="9525">
-            <a:solidFill>
-              <a:srgbClr val="338C40">
-                <a:alpha val="75000"/>
-              </a:srgbClr>
-            </a:solidFill>
-            <a:prstDash val="solid"/>
-          </a:ln>
-        </p:spPr>
-      </p:sp>
-      <p:sp>
-        <p:nvSpPr>
-          <p:cNvPr id="20" name="Shape 8"/>
-          <p:cNvSpPr/>
-          <p:nvPr/>
-        </p:nvSpPr>
-        <p:spPr>
-          <a:xfrm rot="1959655">
-            <a:off x="1645920" y="1575329"/>
-            <a:ext cx="182880" cy="1355505"/>
-          </a:xfrm>
-          <a:prstGeom prst="triangle">
-            <a:avLst/>
-          </a:prstGeom>
-          <a:solidFill>
-            <a:srgbClr val="338C40">
-              <a:alpha val="52000"/>
-            </a:srgbClr>
-          </a:solidFill>
-          <a:ln w="9525">
-            <a:solidFill>
-              <a:srgbClr val="338C40">
-                <a:alpha val="75000"/>
-              </a:srgbClr>
-            </a:solidFill>
-            <a:prstDash val="solid"/>
-          </a:ln>
-        </p:spPr>
-      </p:sp>
-      <p:sp>
-        <p:nvSpPr>
-          <p:cNvPr id="21" name="Shape 9"/>
-          <p:cNvSpPr/>
-          <p:nvPr/>
-        </p:nvSpPr>
-        <p:spPr>
-          <a:xfrm rot="5017031">
-            <a:off x="7144207" y="627586"/>
-            <a:ext cx="237744" cy="2497161"/>
-          </a:xfrm>
-          <a:prstGeom prst="triangle">
-            <a:avLst/>
-          </a:prstGeom>
-          <a:solidFill>
-            <a:srgbClr val="0073BA">
-              <a:alpha val="45000"/>
-            </a:srgbClr>
-          </a:solidFill>
-          <a:ln w="9525">
-            <a:solidFill>
-              <a:srgbClr val="0073BA">
-                <a:alpha val="75000"/>
-              </a:srgbClr>
-            </a:solidFill>
-            <a:prstDash val="solid"/>
-          </a:ln>
-        </p:spPr>
-      </p:sp>
-      <p:sp>
-        <p:nvSpPr>
-          <p:cNvPr id="22" name="Shape 10"/>
-          <p:cNvSpPr/>
-          <p:nvPr/>
-        </p:nvSpPr>
-        <p:spPr>
-          <a:xfrm rot="-5017031">
-            <a:off x="3826307" y="989469"/>
-            <a:ext cx="237744" cy="1682869"/>
-          </a:xfrm>
-          <a:prstGeom prst="triangle">
-            <a:avLst/>
-          </a:prstGeom>
-          <a:solidFill>
-            <a:srgbClr val="B81A29">
-              <a:alpha val="42000"/>
-            </a:srgbClr>
-          </a:solidFill>
-          <a:ln w="9525">
-            <a:solidFill>
-              <a:srgbClr val="B81A29">
-                <a:alpha val="75000"/>
-              </a:srgbClr>
-            </a:solidFill>
-            <a:prstDash val="solid"/>
-          </a:ln>
-        </p:spPr>
-      </p:sp>
-      <p:sp>
-        <p:nvSpPr>
-          <p:cNvPr id="23" name="Shape 11"/>
-          <p:cNvSpPr/>
-          <p:nvPr/>
-        </p:nvSpPr>
-        <p:spPr>
-          <a:xfrm>
-            <a:off x="4914900" y="1860804"/>
-            <a:ext cx="173736" cy="173736"/>
-          </a:xfrm>
-          <a:prstGeom prst="line">
-            <a:avLst/>
-          </a:prstGeom>
-          <a:noFill/>
-          <a:ln w="31750">
-            <a:solidFill>
-              <a:srgbClr val="B81A29"/>
-            </a:solidFill>
-            <a:prstDash val="solid"/>
-          </a:ln>
-        </p:spPr>
-      </p:sp>
-      <p:sp>
-        <p:nvSpPr>
-          <p:cNvPr id="24" name="Shape 12"/>
-          <p:cNvSpPr/>
-          <p:nvPr/>
-        </p:nvSpPr>
-        <p:spPr>
-          <a:xfrm flipV="1">
-            <a:off x="4914900" y="1860804"/>
-            <a:ext cx="173736" cy="173736"/>
-          </a:xfrm>
-          <a:prstGeom prst="line">
-            <a:avLst/>
-          </a:prstGeom>
-          <a:noFill/>
-          <a:ln w="31750">
-            <a:solidFill>
-              <a:srgbClr val="B81A29"/>
-            </a:solidFill>
-            <a:prstDash val="solid"/>
-          </a:ln>
-        </p:spPr>
-      </p:sp>
-      <p:pic>
-        <p:nvPicPr>
-          <p:cNvPr id="25" name="Image 10" descr="preencoded.png">    </p:cNvPr>
-          <p:cNvPicPr>
-            <a:picLocks noChangeAspect="1"/>
-          </p:cNvPicPr>
-          <p:nvPr/>
-        </p:nvPicPr>
-        <p:blipFill>
-          <a:blip r:embed="rId11"/>
-          <a:stretch>
-            <a:fillRect/>
-          </a:stretch>
-        </p:blipFill>
-        <p:spPr>
-          <a:xfrm>
-            <a:off x="2639594" y="1600200"/>
-            <a:ext cx="938732" cy="1188720"/>
-          </a:xfrm>
-          <a:prstGeom prst="rect">
-            <a:avLst/>
-          </a:prstGeom>
-        </p:spPr>
-      </p:pic>
-      <p:pic>
-        <p:nvPicPr>
-          <p:cNvPr id="26" name="Image 11" descr="preencoded.png">    </p:cNvPr>
-          <p:cNvPicPr>
-            <a:picLocks noChangeAspect="1"/>
-          </p:cNvPicPr>
-          <p:nvPr/>
-        </p:nvPicPr>
-        <p:blipFill>
-          <a:blip r:embed="rId12"/>
-          <a:stretch>
-            <a:fillRect/>
-          </a:stretch>
-        </p:blipFill>
-        <p:spPr>
-          <a:xfrm>
-            <a:off x="8034554" y="1600200"/>
-            <a:ext cx="938732" cy="1188720"/>
-          </a:xfrm>
-          <a:prstGeom prst="rect">
-            <a:avLst/>
-          </a:prstGeom>
-        </p:spPr>
-      </p:pic>
-      <p:pic>
-        <p:nvPicPr>
-          <p:cNvPr id="27" name="Image 12" descr="preencoded.png">    </p:cNvPr>
-          <p:cNvPicPr>
-            <a:picLocks noChangeAspect="1"/>
-          </p:cNvPicPr>
-          <p:nvPr/>
-        </p:nvPicPr>
-        <p:blipFill>
-          <a:blip r:embed="rId13"/>
-          <a:stretch>
-            <a:fillRect/>
-          </a:stretch>
-        </p:blipFill>
-        <p:spPr>
-          <a:xfrm>
-            <a:off x="1822843" y="1737360"/>
-            <a:ext cx="560555" cy="502920"/>
-          </a:xfrm>
-          <a:prstGeom prst="rect">
-            <a:avLst/>
-          </a:prstGeom>
-        </p:spPr>
-      </p:pic>
-      <p:sp>
-        <p:nvSpPr>
-          <p:cNvPr id="28" name="Shape 13"/>
-          <p:cNvSpPr/>
-          <p:nvPr/>
-        </p:nvSpPr>
-        <p:spPr>
-          <a:xfrm>
-            <a:off x="1965960" y="1600200"/>
-            <a:ext cx="274320" cy="137160"/>
-          </a:xfrm>
-          <a:prstGeom prst="rect">
-            <a:avLst/>
-          </a:prstGeom>
-          <a:solidFill>
-            <a:srgbClr val="0D2680"/>
-          </a:solidFill>
-          <a:ln/>
-        </p:spPr>
-      </p:sp>
-      <p:pic>
-        <p:nvPicPr>
-          <p:cNvPr id="29" name="Image 13" descr="preencoded.png">    </p:cNvPr>
-          <p:cNvPicPr>
-            <a:picLocks noChangeAspect="1"/>
-          </p:cNvPicPr>
-          <p:nvPr/>
-        </p:nvPicPr>
-        <p:blipFill>
-          <a:blip r:embed="rId14"/>
-          <a:stretch>
-            <a:fillRect/>
-          </a:stretch>
-        </p:blipFill>
-        <p:spPr>
-          <a:xfrm>
-            <a:off x="5526163" y="2194560"/>
-            <a:ext cx="560555" cy="502920"/>
-          </a:xfrm>
-          <a:prstGeom prst="rect">
-            <a:avLst/>
-          </a:prstGeom>
-        </p:spPr>
-      </p:pic>
-      <p:pic>
-        <p:nvPicPr>
-          <p:cNvPr id="30" name="Image 14" descr="preencoded.png">    </p:cNvPr>
-          <p:cNvPicPr>
-            <a:picLocks noChangeAspect="1"/>
-          </p:cNvPicPr>
-          <p:nvPr/>
-        </p:nvPicPr>
-        <p:blipFill>
-          <a:blip r:embed="rId15"/>
-          <a:stretch>
-            <a:fillRect/>
-          </a:stretch>
-        </p:blipFill>
-        <p:spPr>
-          <a:xfrm>
-            <a:off x="5658982" y="1883664"/>
-            <a:ext cx="294916" cy="310896"/>
-          </a:xfrm>
-          <a:prstGeom prst="rect">
-            <a:avLst/>
-          </a:prstGeom>
-        </p:spPr>
-      </p:pic>
-      <p:pic>
-        <p:nvPicPr>
-          <p:cNvPr id="31" name="Image 15" descr="preencoded.png">    </p:cNvPr>
-          <p:cNvPicPr>
-            <a:picLocks noChangeAspect="1"/>
-          </p:cNvPicPr>
-          <p:nvPr/>
-        </p:nvPicPr>
-        <p:blipFill>
-          <a:blip r:embed="rId16"/>
-          <a:stretch>
-            <a:fillRect/>
-          </a:stretch>
-        </p:blipFill>
-        <p:spPr>
-          <a:xfrm>
-            <a:off x="936908" y="2971800"/>
-            <a:ext cx="503624" cy="274320"/>
+            <a:off x="661274" y="2794253"/>
+            <a:ext cx="528658" cy="287956"/>
           </a:xfrm>
           <a:prstGeom prst="rect">
             <a:avLst/>
@@ -1636,8 +1441,8 @@
         </p:nvSpPr>
         <p:spPr>
           <a:xfrm>
-            <a:off x="2240280" y="2834640"/>
-            <a:ext cx="1737360" cy="182880"/>
+            <a:off x="2029434" y="2650275"/>
+            <a:ext cx="1823721" cy="191971"/>
           </a:xfrm>
           <a:prstGeom prst="rect">
             <a:avLst/>
@@ -1649,11 +1454,11 @@
           <a:bodyPr wrap="square" lIns="0" tIns="0" rIns="0" bIns="0" rtlCol="0" anchor="ctr"/>
           <a:lstStyle/>
           <a:p>
-            <a:pPr algn="ctr" indent="0" marL="0">
+            <a:pPr marL="0" indent="0" algn="ctr">
               <a:buNone/>
             </a:pPr>
             <a:r>
-              <a:rPr lang="en-US" sz="1100" b="1" dirty="0">
+              <a:rPr lang="en-US" sz="1155" b="1" dirty="0" err="1">
                 <a:solidFill>
                   <a:srgbClr val="1A1A1A"/>
                 </a:solidFill>
@@ -1661,38 +1466,10 @@
                 <a:ea typeface="Times New Roman" pitchFamily="34" charset="-122"/>
                 <a:cs typeface="Times New Roman" pitchFamily="34" charset="-120"/>
               </a:rPr>
-              <a:t>gNB site 1</a:t>
+              <a:t>gNB</a:t>
             </a:r>
-            <a:endParaRPr lang="en-US" sz="1100" dirty="0"/>
-          </a:p>
-        </p:txBody>
-      </p:sp>
-      <p:sp>
-        <p:nvSpPr>
-          <p:cNvPr id="33" name="Text 15"/>
-          <p:cNvSpPr/>
-          <p:nvPr/>
-        </p:nvSpPr>
-        <p:spPr>
-          <a:xfrm>
-            <a:off x="7635240" y="2834640"/>
-            <a:ext cx="1737360" cy="182880"/>
-          </a:xfrm>
-          <a:prstGeom prst="rect">
-            <a:avLst/>
-          </a:prstGeom>
-          <a:noFill/>
-          <a:ln/>
-        </p:spPr>
-        <p:txBody>
-          <a:bodyPr wrap="square" lIns="0" tIns="0" rIns="0" bIns="0" rtlCol="0" anchor="ctr"/>
-          <a:lstStyle/>
-          <a:p>
-            <a:pPr algn="ctr" indent="0" marL="0">
-              <a:buNone/>
-            </a:pPr>
             <a:r>
-              <a:rPr lang="en-US" sz="1100" b="1" dirty="0">
+              <a:rPr lang="en-US" sz="1155" b="1" dirty="0">
                 <a:solidFill>
                   <a:srgbClr val="1A1A1A"/>
                 </a:solidFill>
@@ -1700,22 +1477,22 @@
                 <a:ea typeface="Times New Roman" pitchFamily="34" charset="-122"/>
                 <a:cs typeface="Times New Roman" pitchFamily="34" charset="-120"/>
               </a:rPr>
-              <a:t>gNB site 2</a:t>
+              <a:t> 1</a:t>
             </a:r>
-            <a:endParaRPr lang="en-US" sz="1100" dirty="0"/>
-          </a:p>
-        </p:txBody>
-      </p:sp>
-      <p:sp>
-        <p:nvSpPr>
-          <p:cNvPr id="34" name="Text 16"/>
+            <a:endParaRPr lang="en-US" sz="1155" dirty="0"/>
+          </a:p>
+        </p:txBody>
+      </p:sp>
+      <p:sp>
+        <p:nvSpPr>
+          <p:cNvPr id="33" name="Text 15"/>
           <p:cNvSpPr/>
           <p:nvPr/>
         </p:nvSpPr>
         <p:spPr>
           <a:xfrm>
-            <a:off x="1691640" y="1399032"/>
-            <a:ext cx="822960" cy="173736"/>
+            <a:off x="7692568" y="2650275"/>
+            <a:ext cx="1823721" cy="191971"/>
           </a:xfrm>
           <a:prstGeom prst="rect">
             <a:avLst/>
@@ -1727,11 +1504,61 @@
           <a:bodyPr wrap="square" lIns="0" tIns="0" rIns="0" bIns="0" rtlCol="0" anchor="ctr"/>
           <a:lstStyle/>
           <a:p>
-            <a:pPr algn="ctr" indent="0" marL="0">
+            <a:pPr marL="0" indent="0" algn="ctr">
               <a:buNone/>
             </a:pPr>
             <a:r>
-              <a:rPr lang="en-US" sz="1100" b="1" dirty="0">
+              <a:rPr lang="en-US" sz="1155" b="1" dirty="0" err="1">
+                <a:solidFill>
+                  <a:srgbClr val="1A1A1A"/>
+                </a:solidFill>
+                <a:latin typeface="Times New Roman" pitchFamily="34" charset="0"/>
+                <a:ea typeface="Times New Roman" pitchFamily="34" charset="-122"/>
+                <a:cs typeface="Times New Roman" pitchFamily="34" charset="-120"/>
+              </a:rPr>
+              <a:t>gNB</a:t>
+            </a:r>
+            <a:r>
+              <a:rPr lang="en-US" sz="1155" b="1" dirty="0">
+                <a:solidFill>
+                  <a:srgbClr val="1A1A1A"/>
+                </a:solidFill>
+                <a:latin typeface="Times New Roman" pitchFamily="34" charset="0"/>
+                <a:ea typeface="Times New Roman" pitchFamily="34" charset="-122"/>
+                <a:cs typeface="Times New Roman" pitchFamily="34" charset="-120"/>
+              </a:rPr>
+              <a:t> 2</a:t>
+            </a:r>
+            <a:endParaRPr lang="en-US" sz="1155" dirty="0"/>
+          </a:p>
+        </p:txBody>
+      </p:sp>
+      <p:sp>
+        <p:nvSpPr>
+          <p:cNvPr id="34" name="Text 16"/>
+          <p:cNvSpPr/>
+          <p:nvPr/>
+        </p:nvSpPr>
+        <p:spPr>
+          <a:xfrm>
+            <a:off x="1453522" y="1143305"/>
+            <a:ext cx="863868" cy="182372"/>
+          </a:xfrm>
+          <a:prstGeom prst="rect">
+            <a:avLst/>
+          </a:prstGeom>
+          <a:noFill/>
+          <a:ln/>
+        </p:spPr>
+        <p:txBody>
+          <a:bodyPr wrap="square" lIns="0" tIns="0" rIns="0" bIns="0" rtlCol="0" anchor="ctr"/>
+          <a:lstStyle/>
+          <a:p>
+            <a:pPr marL="0" indent="0" algn="ctr">
+              <a:buNone/>
+            </a:pPr>
+            <a:r>
+              <a:rPr lang="en-US" sz="1155" b="1" dirty="0">
                 <a:solidFill>
                   <a:srgbClr val="0D2680"/>
                 </a:solidFill>
@@ -1741,20 +1568,20 @@
               </a:rPr>
               <a:t>NCR</a:t>
             </a:r>
-            <a:endParaRPr lang="en-US" sz="1100" dirty="0"/>
-          </a:p>
-        </p:txBody>
-      </p:sp>
-      <p:sp>
-        <p:nvSpPr>
-          <p:cNvPr id="35" name="Text 17"/>
+            <a:endParaRPr lang="en-US" sz="1155" dirty="0"/>
+          </a:p>
+        </p:txBody>
+      </p:sp>
+      <p:sp>
+        <p:nvSpPr>
+          <p:cNvPr id="36" name="Text 18"/>
           <p:cNvSpPr/>
           <p:nvPr/>
         </p:nvSpPr>
         <p:spPr>
           <a:xfrm>
-            <a:off x="594360" y="3291840"/>
-            <a:ext cx="1188720" cy="173736"/>
+            <a:off x="4956986" y="1364072"/>
+            <a:ext cx="1631750" cy="182372"/>
           </a:xfrm>
           <a:prstGeom prst="rect">
             <a:avLst/>
@@ -1766,50 +1593,11 @@
           <a:bodyPr wrap="square" lIns="0" tIns="0" rIns="0" bIns="0" rtlCol="0" anchor="ctr"/>
           <a:lstStyle/>
           <a:p>
-            <a:pPr algn="ctr" indent="0" marL="0">
+            <a:pPr marL="0" indent="0" algn="ctr">
               <a:buNone/>
             </a:pPr>
             <a:r>
-              <a:rPr lang="en-US" sz="1000" dirty="0">
-                <a:solidFill>
-                  <a:srgbClr val="1A1A1A"/>
-                </a:solidFill>
-                <a:latin typeface="Times New Roman" pitchFamily="34" charset="0"/>
-                <a:ea typeface="Times New Roman" pitchFamily="34" charset="-122"/>
-                <a:cs typeface="Times New Roman" pitchFamily="34" charset="-120"/>
-              </a:rPr>
-              <a:t>in-car UE</a:t>
-            </a:r>
-            <a:endParaRPr lang="en-US" sz="1000" dirty="0"/>
-          </a:p>
-        </p:txBody>
-      </p:sp>
-      <p:sp>
-        <p:nvSpPr>
-          <p:cNvPr id="36" name="Text 18"/>
-          <p:cNvSpPr/>
-          <p:nvPr/>
-        </p:nvSpPr>
-        <p:spPr>
-          <a:xfrm>
-            <a:off x="5029200" y="1609344"/>
-            <a:ext cx="1554480" cy="173736"/>
-          </a:xfrm>
-          <a:prstGeom prst="rect">
-            <a:avLst/>
-          </a:prstGeom>
-          <a:noFill/>
-          <a:ln/>
-        </p:spPr>
-        <p:txBody>
-          <a:bodyPr wrap="square" lIns="0" tIns="0" rIns="0" bIns="0" rtlCol="0" anchor="ctr"/>
-          <a:lstStyle/>
-          <a:p>
-            <a:pPr algn="ctr" indent="0" marL="0">
-              <a:buNone/>
-            </a:pPr>
-            <a:r>
-              <a:rPr lang="en-US" sz="1000" b="1" dirty="0">
+              <a:rPr lang="en-US" sz="1050" b="1" dirty="0">
                 <a:solidFill>
                   <a:srgbClr val="1A1A1A"/>
                 </a:solidFill>
@@ -1819,20 +1607,20 @@
               </a:rPr>
               <a:t>FWA CPE (cell edge)</a:t>
             </a:r>
-            <a:endParaRPr lang="en-US" sz="1000" dirty="0"/>
-          </a:p>
-        </p:txBody>
-      </p:sp>
-      <p:sp>
-        <p:nvSpPr>
-          <p:cNvPr id="37" name="Text 19"/>
+            <a:endParaRPr lang="en-US" sz="1050" dirty="0"/>
+          </a:p>
+        </p:txBody>
+      </p:sp>
+      <p:sp>
+        <p:nvSpPr>
+          <p:cNvPr id="38" name="Text 20"/>
           <p:cNvSpPr/>
           <p:nvPr/>
         </p:nvSpPr>
         <p:spPr>
           <a:xfrm>
-            <a:off x="457200" y="1783080"/>
-            <a:ext cx="1143000" cy="384048"/>
+            <a:off x="3805163" y="1901589"/>
+            <a:ext cx="1583758" cy="383941"/>
           </a:xfrm>
           <a:prstGeom prst="rect">
             <a:avLst/>
@@ -1844,76 +1632,14 @@
           <a:bodyPr wrap="square" lIns="0" tIns="0" rIns="0" bIns="0" rtlCol="0" anchor="ctr"/>
           <a:lstStyle/>
           <a:p>
-            <a:pPr indent="0" marL="0">
+            <a:pPr marL="0" indent="0" algn="r">
               <a:lnSpc>
                 <a:spcPct val="95000"/>
               </a:lnSpc>
               <a:buNone/>
             </a:pPr>
             <a:r>
-              <a:rPr lang="en-US" sz="900" i="1" dirty="0">
-                <a:solidFill>
-                  <a:srgbClr val="5A5A5A"/>
-                </a:solidFill>
-                <a:latin typeface="Times New Roman" pitchFamily="34" charset="0"/>
-                <a:ea typeface="Times New Roman" pitchFamily="34" charset="-122"/>
-                <a:cs typeface="Times New Roman" pitchFamily="34" charset="-120"/>
-              </a:rPr>
-              <a:t>stale CSI at 40 km/h —</a:t>
-            </a:r>
-            <a:endParaRPr lang="en-US" sz="900" dirty="0"/>
-          </a:p>
-          <a:p>
-            <a:pPr indent="0" marL="0">
-              <a:lnSpc>
-                <a:spcPct val="95000"/>
-              </a:lnSpc>
-              <a:buNone/>
-            </a:pPr>
-            <a:r>
-              <a:rPr lang="en-US" sz="900" i="1" dirty="0">
-                <a:solidFill>
-                  <a:srgbClr val="5A5A5A"/>
-                </a:solidFill>
-                <a:latin typeface="Times New Roman" pitchFamily="34" charset="0"/>
-                <a:ea typeface="Times New Roman" pitchFamily="34" charset="-122"/>
-                <a:cs typeface="Times New Roman" pitchFamily="34" charset="-120"/>
-              </a:rPr>
-              <a:t>the relay hop bypasses it</a:t>
-            </a:r>
-            <a:endParaRPr lang="en-US" sz="900" dirty="0"/>
-          </a:p>
-        </p:txBody>
-      </p:sp>
-      <p:sp>
-        <p:nvSpPr>
-          <p:cNvPr id="38" name="Text 20"/>
-          <p:cNvSpPr/>
-          <p:nvPr/>
-        </p:nvSpPr>
-        <p:spPr>
-          <a:xfrm>
-            <a:off x="3931920" y="2121408"/>
-            <a:ext cx="1508760" cy="365760"/>
-          </a:xfrm>
-          <a:prstGeom prst="rect">
-            <a:avLst/>
-          </a:prstGeom>
-          <a:noFill/>
-          <a:ln/>
-        </p:spPr>
-        <p:txBody>
-          <a:bodyPr wrap="square" lIns="0" tIns="0" rIns="0" bIns="0" rtlCol="0" anchor="ctr"/>
-          <a:lstStyle/>
-          <a:p>
-            <a:pPr algn="r" indent="0" marL="0">
-              <a:lnSpc>
-                <a:spcPct val="95000"/>
-              </a:lnSpc>
-              <a:buNone/>
-            </a:pPr>
-            <a:r>
-              <a:rPr lang="en-US" sz="900" i="1" dirty="0">
+              <a:rPr lang="en-US" sz="945" i="1" dirty="0">
                 <a:solidFill>
                   <a:srgbClr val="B81A29"/>
                 </a:solidFill>
@@ -1923,17 +1649,17 @@
               </a:rPr>
               <a:t>other-site interference</a:t>
             </a:r>
-            <a:endParaRPr lang="en-US" sz="900" dirty="0"/>
-          </a:p>
-          <a:p>
-            <a:pPr algn="r" indent="0" marL="0">
+            <a:endParaRPr lang="en-US" sz="945" dirty="0"/>
+          </a:p>
+          <a:p>
+            <a:pPr marL="0" indent="0" algn="r">
               <a:lnSpc>
                 <a:spcPct val="95000"/>
               </a:lnSpc>
               <a:buNone/>
             </a:pPr>
             <a:r>
-              <a:rPr lang="en-US" sz="900" i="1" dirty="0">
+              <a:rPr lang="en-US" sz="945" i="1" dirty="0">
                 <a:solidFill>
                   <a:srgbClr val="B81A29"/>
                 </a:solidFill>
@@ -1943,45 +1669,20 @@
               </a:rPr>
               <a:t>nulled by the CPE array</a:t>
             </a:r>
-            <a:endParaRPr lang="en-US" sz="900" dirty="0"/>
-          </a:p>
-        </p:txBody>
-      </p:sp>
-      <p:sp>
-        <p:nvSpPr>
-          <p:cNvPr id="39" name="Shape 21"/>
+            <a:endParaRPr lang="en-US" sz="945" dirty="0"/>
+          </a:p>
+        </p:txBody>
+      </p:sp>
+      <p:sp>
+        <p:nvSpPr>
+          <p:cNvPr id="48" name="Text 30"/>
           <p:cNvSpPr/>
           <p:nvPr/>
         </p:nvSpPr>
         <p:spPr>
           <a:xfrm>
-            <a:off x="8796528" y="310896"/>
-            <a:ext cx="3072384" cy="1024128"/>
-          </a:xfrm>
-          <a:prstGeom prst="rect">
-            <a:avLst/>
-          </a:prstGeom>
-          <a:solidFill>
-            <a:srgbClr val="FFFFFF"/>
-          </a:solidFill>
-          <a:ln w="12700">
-            <a:solidFill>
-              <a:srgbClr val="D8D8D8"/>
-            </a:solidFill>
-            <a:prstDash val="solid"/>
-          </a:ln>
-        </p:spPr>
-      </p:sp>
-      <p:sp>
-        <p:nvSpPr>
-          <p:cNvPr id="40" name="Text 22"/>
-          <p:cNvSpPr/>
-          <p:nvPr/>
-        </p:nvSpPr>
-        <p:spPr>
-          <a:xfrm>
-            <a:off x="8924544" y="393192"/>
-            <a:ext cx="2816352" cy="182880"/>
+            <a:off x="1405530" y="2560995"/>
+            <a:ext cx="888280" cy="191971"/>
           </a:xfrm>
           <a:prstGeom prst="rect">
             <a:avLst/>
@@ -1993,283 +1694,11 @@
           <a:bodyPr wrap="square" lIns="0" tIns="0" rIns="0" bIns="0" rtlCol="0" anchor="ctr"/>
           <a:lstStyle/>
           <a:p>
-            <a:pPr indent="0" marL="0">
+            <a:pPr marL="0" indent="0">
               <a:buNone/>
             </a:pPr>
             <a:r>
-              <a:rPr lang="en-US" sz="1100" b="1" dirty="0">
-                <a:solidFill>
-                  <a:srgbClr val="1A1A1A"/>
-                </a:solidFill>
-                <a:latin typeface="Times New Roman" pitchFamily="34" charset="0"/>
-                <a:ea typeface="Times New Roman" pitchFamily="34" charset="-122"/>
-                <a:cs typeface="Times New Roman" pitchFamily="34" charset="-120"/>
-              </a:rPr>
-              <a:t>Orthogonal sub-bands</a:t>
-            </a:r>
-            <a:endParaRPr lang="en-US" sz="1100" dirty="0"/>
-          </a:p>
-        </p:txBody>
-      </p:sp>
-      <p:sp>
-        <p:nvSpPr>
-          <p:cNvPr id="41" name="Shape 23"/>
-          <p:cNvSpPr/>
-          <p:nvPr/>
-        </p:nvSpPr>
-        <p:spPr>
-          <a:xfrm>
-            <a:off x="8961120" y="640080"/>
-            <a:ext cx="1298448" cy="256032"/>
-          </a:xfrm>
-          <a:prstGeom prst="rect">
-            <a:avLst/>
-          </a:prstGeom>
-          <a:solidFill>
-            <a:srgbClr val="5B6B7A"/>
-          </a:solidFill>
-          <a:ln w="12700">
-            <a:solidFill>
-              <a:srgbClr val="FFFFFF"/>
-            </a:solidFill>
-            <a:prstDash val="solid"/>
-          </a:ln>
-        </p:spPr>
-      </p:sp>
-      <p:sp>
-        <p:nvSpPr>
-          <p:cNvPr id="42" name="Shape 24"/>
-          <p:cNvSpPr/>
-          <p:nvPr/>
-        </p:nvSpPr>
-        <p:spPr>
-          <a:xfrm>
-            <a:off x="10259568" y="640080"/>
-            <a:ext cx="1426464" cy="256032"/>
-          </a:xfrm>
-          <a:prstGeom prst="rect">
-            <a:avLst/>
-          </a:prstGeom>
-          <a:solidFill>
-            <a:srgbClr val="0073BA"/>
-          </a:solidFill>
-          <a:ln w="12700">
-            <a:solidFill>
-              <a:srgbClr val="FFFFFF"/>
-            </a:solidFill>
-            <a:prstDash val="solid"/>
-          </a:ln>
-        </p:spPr>
-      </p:sp>
-      <p:sp>
-        <p:nvSpPr>
-          <p:cNvPr id="43" name="Text 25"/>
-          <p:cNvSpPr/>
-          <p:nvPr/>
-        </p:nvSpPr>
-        <p:spPr>
-          <a:xfrm>
-            <a:off x="8961120" y="694944"/>
-            <a:ext cx="1298448" cy="164592"/>
-          </a:xfrm>
-          <a:prstGeom prst="rect">
-            <a:avLst/>
-          </a:prstGeom>
-          <a:noFill/>
-          <a:ln/>
-        </p:spPr>
-        <p:txBody>
-          <a:bodyPr wrap="square" lIns="0" tIns="0" rIns="0" bIns="0" rtlCol="0" anchor="ctr"/>
-          <a:lstStyle/>
-          <a:p>
-            <a:pPr algn="ctr" indent="0" marL="0">
-              <a:buNone/>
-            </a:pPr>
-            <a:r>
-              <a:rPr lang="en-US" sz="1000" b="1" dirty="0">
-                <a:solidFill>
-                  <a:srgbClr val="FFFFFF"/>
-                </a:solidFill>
-                <a:latin typeface="Times New Roman" pitchFamily="34" charset="0"/>
-                <a:ea typeface="Times New Roman" pitchFamily="34" charset="-122"/>
-                <a:cs typeface="Times New Roman" pitchFamily="34" charset="-120"/>
-              </a:rPr>
-              <a:t>cellular</a:t>
-            </a:r>
-            <a:endParaRPr lang="en-US" sz="1000" dirty="0"/>
-          </a:p>
-        </p:txBody>
-      </p:sp>
-      <p:sp>
-        <p:nvSpPr>
-          <p:cNvPr id="44" name="Text 26"/>
-          <p:cNvSpPr/>
-          <p:nvPr/>
-        </p:nvSpPr>
-        <p:spPr>
-          <a:xfrm>
-            <a:off x="10259568" y="694944"/>
-            <a:ext cx="1426464" cy="164592"/>
-          </a:xfrm>
-          <a:prstGeom prst="rect">
-            <a:avLst/>
-          </a:prstGeom>
-          <a:noFill/>
-          <a:ln/>
-        </p:spPr>
-        <p:txBody>
-          <a:bodyPr wrap="square" lIns="0" tIns="0" rIns="0" bIns="0" rtlCol="0" anchor="ctr"/>
-          <a:lstStyle/>
-          <a:p>
-            <a:pPr algn="ctr" indent="0" marL="0">
-              <a:buNone/>
-            </a:pPr>
-            <a:r>
-              <a:rPr lang="en-US" sz="1000" b="1" dirty="0">
-                <a:solidFill>
-                  <a:srgbClr val="FFFFFF"/>
-                </a:solidFill>
-                <a:latin typeface="Times New Roman" pitchFamily="34" charset="0"/>
-                <a:ea typeface="Times New Roman" pitchFamily="34" charset="-122"/>
-                <a:cs typeface="Times New Roman" pitchFamily="34" charset="-120"/>
-              </a:rPr>
-              <a:t>FWA</a:t>
-            </a:r>
-            <a:endParaRPr lang="en-US" sz="1000" dirty="0"/>
-          </a:p>
-        </p:txBody>
-      </p:sp>
-      <p:sp>
-        <p:nvSpPr>
-          <p:cNvPr id="45" name="Text 27"/>
-          <p:cNvSpPr/>
-          <p:nvPr/>
-        </p:nvSpPr>
-        <p:spPr>
-          <a:xfrm>
-            <a:off x="10314432" y="914400"/>
-            <a:ext cx="1371600" cy="146304"/>
-          </a:xfrm>
-          <a:prstGeom prst="rect">
-            <a:avLst/>
-          </a:prstGeom>
-          <a:noFill/>
-          <a:ln/>
-        </p:spPr>
-        <p:txBody>
-          <a:bodyPr wrap="square" lIns="0" tIns="0" rIns="0" bIns="0" rtlCol="0" anchor="ctr"/>
-          <a:lstStyle/>
-          <a:p>
-            <a:pPr algn="r" indent="0" marL="0">
-              <a:buNone/>
-            </a:pPr>
-            <a:r>
-              <a:rPr lang="en-US" sz="850" i="1" dirty="0">
-                <a:solidFill>
-                  <a:srgbClr val="5A5A5A"/>
-                </a:solidFill>
-                <a:latin typeface="Times New Roman" pitchFamily="34" charset="0"/>
-                <a:ea typeface="Times New Roman" pitchFamily="34" charset="-122"/>
-                <a:cs typeface="Times New Roman" pitchFamily="34" charset="-120"/>
-              </a:rPr>
-              <a:t>frequency  →</a:t>
-            </a:r>
-            <a:endParaRPr lang="en-US" sz="850" dirty="0"/>
-          </a:p>
-        </p:txBody>
-      </p:sp>
-      <p:sp>
-        <p:nvSpPr>
-          <p:cNvPr id="46" name="Text 28"/>
-          <p:cNvSpPr/>
-          <p:nvPr/>
-        </p:nvSpPr>
-        <p:spPr>
-          <a:xfrm>
-            <a:off x="8924544" y="1097280"/>
-            <a:ext cx="2816352" cy="182880"/>
-          </a:xfrm>
-          <a:prstGeom prst="rect">
-            <a:avLst/>
-          </a:prstGeom>
-          <a:noFill/>
-          <a:ln/>
-        </p:spPr>
-        <p:txBody>
-          <a:bodyPr wrap="square" lIns="0" tIns="0" rIns="0" bIns="0" rtlCol="0" anchor="ctr"/>
-          <a:lstStyle/>
-          <a:p>
-            <a:pPr indent="0" marL="0">
-              <a:buNone/>
-            </a:pPr>
-            <a:r>
-              <a:rPr lang="en-US" sz="850" i="1" dirty="0">
-                <a:solidFill>
-                  <a:srgbClr val="5A5A5A"/>
-                </a:solidFill>
-                <a:latin typeface="Times New Roman" pitchFamily="34" charset="0"/>
-                <a:ea typeface="Times New Roman" pitchFamily="34" charset="-122"/>
-                <a:cs typeface="Times New Roman" pitchFamily="34" charset="-120"/>
-              </a:rPr>
-              <a:t>the two services never share a resource — no cross-interference</a:t>
-            </a:r>
-            <a:endParaRPr lang="en-US" sz="850" dirty="0"/>
-          </a:p>
-        </p:txBody>
-      </p:sp>
-      <p:sp>
-        <p:nvSpPr>
-          <p:cNvPr id="47" name="Shape 29"/>
-          <p:cNvSpPr/>
-          <p:nvPr/>
-        </p:nvSpPr>
-        <p:spPr>
-          <a:xfrm rot="5400000">
-            <a:off x="457200" y="3931920"/>
-            <a:ext cx="105156" cy="274320"/>
-          </a:xfrm>
-          <a:prstGeom prst="triangle">
-            <a:avLst/>
-          </a:prstGeom>
-          <a:solidFill>
-            <a:srgbClr val="8A8A8A">
-              <a:alpha val="55000"/>
-            </a:srgbClr>
-          </a:solidFill>
-          <a:ln w="9525">
-            <a:solidFill>
-              <a:srgbClr val="8A8A8A"/>
-            </a:solidFill>
-            <a:prstDash val="solid"/>
-          </a:ln>
-        </p:spPr>
-      </p:sp>
-      <p:sp>
-        <p:nvSpPr>
-          <p:cNvPr id="48" name="Text 30"/>
-          <p:cNvSpPr/>
-          <p:nvPr/>
-        </p:nvSpPr>
-        <p:spPr>
-          <a:xfrm>
-            <a:off x="804672" y="3968496"/>
-            <a:ext cx="2331720" cy="201168"/>
-          </a:xfrm>
-          <a:prstGeom prst="rect">
-            <a:avLst/>
-          </a:prstGeom>
-          <a:noFill/>
-          <a:ln/>
-        </p:spPr>
-        <p:txBody>
-          <a:bodyPr wrap="square" lIns="0" tIns="0" rIns="0" bIns="0" rtlCol="0" anchor="ctr"/>
-          <a:lstStyle/>
-          <a:p>
-            <a:pPr indent="0" marL="0">
-              <a:buNone/>
-            </a:pPr>
-            <a:r>
-              <a:rPr lang="en-US" sz="1000" dirty="0">
+              <a:rPr lang="en-US" sz="1050" dirty="0">
                 <a:solidFill>
                   <a:srgbClr val="1A1A1A"/>
                 </a:solidFill>
@@ -2279,36 +1708,9 @@
               </a:rPr>
               <a:t>weak direct path</a:t>
             </a:r>
-            <a:endParaRPr lang="en-US" sz="1000" dirty="0"/>
-          </a:p>
-        </p:txBody>
-      </p:sp>
-      <p:sp>
-        <p:nvSpPr>
-          <p:cNvPr id="49" name="Shape 31"/>
-          <p:cNvSpPr/>
-          <p:nvPr/>
-        </p:nvSpPr>
-        <p:spPr>
-          <a:xfrm rot="5400000">
-            <a:off x="3246120" y="3931920"/>
-            <a:ext cx="105156" cy="274320"/>
-          </a:xfrm>
-          <a:prstGeom prst="triangle">
-            <a:avLst/>
-          </a:prstGeom>
-          <a:solidFill>
-            <a:srgbClr val="338C40">
-              <a:alpha val="55000"/>
-            </a:srgbClr>
-          </a:solidFill>
-          <a:ln w="9525">
-            <a:solidFill>
-              <a:srgbClr val="338C40"/>
-            </a:solidFill>
-            <a:prstDash val="solid"/>
-          </a:ln>
-        </p:spPr>
+            <a:endParaRPr lang="en-US" sz="1050" dirty="0"/>
+          </a:p>
+        </p:txBody>
       </p:sp>
       <p:sp>
         <p:nvSpPr>
@@ -2318,8 +1720,8 @@
         </p:nvSpPr>
         <p:spPr>
           <a:xfrm>
-            <a:off x="3593592" y="3968496"/>
-            <a:ext cx="2331720" cy="201168"/>
+            <a:off x="471238" y="1536005"/>
+            <a:ext cx="1131053" cy="270439"/>
           </a:xfrm>
           <a:prstGeom prst="rect">
             <a:avLst/>
@@ -2331,11 +1733,11 @@
           <a:bodyPr wrap="square" lIns="0" tIns="0" rIns="0" bIns="0" rtlCol="0" anchor="ctr"/>
           <a:lstStyle/>
           <a:p>
-            <a:pPr indent="0" marL="0">
+            <a:pPr marL="0" indent="0">
               <a:buNone/>
             </a:pPr>
             <a:r>
-              <a:rPr lang="en-US" sz="1000" dirty="0">
+              <a:rPr lang="en-US" sz="1050" dirty="0">
                 <a:solidFill>
                   <a:srgbClr val="1A1A1A"/>
                 </a:solidFill>
@@ -2345,36 +1747,9 @@
               </a:rPr>
               <a:t>NCR-relayed path</a:t>
             </a:r>
-            <a:endParaRPr lang="en-US" sz="1000" dirty="0"/>
-          </a:p>
-        </p:txBody>
-      </p:sp>
-      <p:sp>
-        <p:nvSpPr>
-          <p:cNvPr id="51" name="Shape 33"/>
-          <p:cNvSpPr/>
-          <p:nvPr/>
-        </p:nvSpPr>
-        <p:spPr>
-          <a:xfrm rot="5400000">
-            <a:off x="6035040" y="3931920"/>
-            <a:ext cx="105156" cy="274320"/>
-          </a:xfrm>
-          <a:prstGeom prst="triangle">
-            <a:avLst/>
-          </a:prstGeom>
-          <a:solidFill>
-            <a:srgbClr val="0073BA">
-              <a:alpha val="55000"/>
-            </a:srgbClr>
-          </a:solidFill>
-          <a:ln w="9525">
-            <a:solidFill>
-              <a:srgbClr val="0073BA"/>
-            </a:solidFill>
-            <a:prstDash val="solid"/>
-          </a:ln>
-        </p:spPr>
+            <a:endParaRPr lang="en-US" sz="1050" dirty="0"/>
+          </a:p>
+        </p:txBody>
       </p:sp>
       <p:sp>
         <p:nvSpPr>
@@ -2384,8 +1759,8 @@
         </p:nvSpPr>
         <p:spPr>
           <a:xfrm>
-            <a:off x="6382512" y="3968496"/>
-            <a:ext cx="2331720" cy="201168"/>
+            <a:off x="6484754" y="1192072"/>
+            <a:ext cx="1132510" cy="182372"/>
           </a:xfrm>
           <a:prstGeom prst="rect">
             <a:avLst/>
@@ -2397,11 +1772,11 @@
           <a:bodyPr wrap="square" lIns="0" tIns="0" rIns="0" bIns="0" rtlCol="0" anchor="ctr"/>
           <a:lstStyle/>
           <a:p>
-            <a:pPr indent="0" marL="0">
+            <a:pPr marL="0" indent="0">
               <a:buNone/>
             </a:pPr>
             <a:r>
-              <a:rPr lang="en-US" sz="1000" dirty="0">
+              <a:rPr lang="en-US" sz="1050" dirty="0">
                 <a:solidFill>
                   <a:srgbClr val="1A1A1A"/>
                 </a:solidFill>
@@ -2411,36 +1786,9 @@
               </a:rPr>
               <a:t>desired FWA beam</a:t>
             </a:r>
-            <a:endParaRPr lang="en-US" sz="1000" dirty="0"/>
-          </a:p>
-        </p:txBody>
-      </p:sp>
-      <p:sp>
-        <p:nvSpPr>
-          <p:cNvPr id="53" name="Shape 35"/>
-          <p:cNvSpPr/>
-          <p:nvPr/>
-        </p:nvSpPr>
-        <p:spPr>
-          <a:xfrm rot="5400000">
-            <a:off x="8823960" y="3931920"/>
-            <a:ext cx="105156" cy="274320"/>
-          </a:xfrm>
-          <a:prstGeom prst="triangle">
-            <a:avLst/>
-          </a:prstGeom>
-          <a:solidFill>
-            <a:srgbClr val="B81A29">
-              <a:alpha val="55000"/>
-            </a:srgbClr>
-          </a:solidFill>
-          <a:ln w="9525">
-            <a:solidFill>
-              <a:srgbClr val="B81A29"/>
-            </a:solidFill>
-            <a:prstDash val="solid"/>
-          </a:ln>
-        </p:spPr>
+            <a:endParaRPr lang="en-US" sz="1050" dirty="0"/>
+          </a:p>
+        </p:txBody>
       </p:sp>
       <p:sp>
         <p:nvSpPr>
@@ -2450,8 +1798,8 @@
         </p:nvSpPr>
         <p:spPr>
           <a:xfrm>
-            <a:off x="9171432" y="3968496"/>
-            <a:ext cx="2331720" cy="201168"/>
+            <a:off x="3295446" y="1143305"/>
+            <a:ext cx="2447626" cy="211168"/>
           </a:xfrm>
           <a:prstGeom prst="rect">
             <a:avLst/>
@@ -2463,11 +1811,11 @@
           <a:bodyPr wrap="square" lIns="0" tIns="0" rIns="0" bIns="0" rtlCol="0" anchor="ctr"/>
           <a:lstStyle/>
           <a:p>
-            <a:pPr indent="0" marL="0">
+            <a:pPr marL="0" indent="0">
               <a:buNone/>
             </a:pPr>
             <a:r>
-              <a:rPr lang="en-US" sz="1000" dirty="0">
+              <a:rPr lang="en-US" sz="1050" dirty="0">
                 <a:solidFill>
                   <a:srgbClr val="1A1A1A"/>
                 </a:solidFill>
@@ -2477,28 +1825,28 @@
               </a:rPr>
               <a:t>other-site interference (nulled)</a:t>
             </a:r>
-            <a:endParaRPr lang="en-US" sz="1000" dirty="0"/>
+            <a:endParaRPr lang="en-US" sz="1050" dirty="0"/>
           </a:p>
         </p:txBody>
       </p:sp>
       <p:pic>
         <p:nvPicPr>
-          <p:cNvPr id="55" name="Image 16" descr="preencoded.png">    </p:cNvPr>
+          <p:cNvPr id="55" name="Image 16" descr="preencoded.png"/>
           <p:cNvPicPr>
             <a:picLocks noChangeAspect="1"/>
           </p:cNvPicPr>
           <p:nvPr/>
         </p:nvPicPr>
         <p:blipFill>
-          <a:blip r:embed="rId17"/>
+          <a:blip r:embed="rId8"/>
           <a:stretch>
             <a:fillRect/>
           </a:stretch>
         </p:blipFill>
         <p:spPr>
           <a:xfrm>
-            <a:off x="457200" y="4398264"/>
-            <a:ext cx="245515" cy="310896"/>
+            <a:off x="157721" y="4639160"/>
+            <a:ext cx="257719" cy="326350"/>
           </a:xfrm>
           <a:prstGeom prst="rect">
             <a:avLst/>
@@ -2513,8 +1861,8 @@
         </p:nvSpPr>
         <p:spPr>
           <a:xfrm>
-            <a:off x="794155" y="4480560"/>
-            <a:ext cx="1254101" cy="182880"/>
+            <a:off x="511425" y="4725547"/>
+            <a:ext cx="1316440" cy="191971"/>
           </a:xfrm>
           <a:prstGeom prst="rect">
             <a:avLst/>
@@ -2526,11 +1874,11 @@
           <a:bodyPr wrap="square" lIns="0" tIns="0" rIns="0" bIns="0" rtlCol="0" anchor="ctr"/>
           <a:lstStyle/>
           <a:p>
-            <a:pPr indent="0" marL="0">
+            <a:pPr marL="0" indent="0">
               <a:buNone/>
             </a:pPr>
             <a:r>
-              <a:rPr lang="en-US" sz="950" dirty="0">
+              <a:rPr lang="en-US" sz="997" dirty="0">
                 <a:solidFill>
                   <a:srgbClr val="1A1A1A"/>
                 </a:solidFill>
@@ -2540,28 +1888,28 @@
               </a:rPr>
               <a:t>gNB site</a:t>
             </a:r>
-            <a:endParaRPr lang="en-US" sz="950" dirty="0"/>
+            <a:endParaRPr lang="en-US" sz="997" dirty="0"/>
           </a:p>
         </p:txBody>
       </p:sp>
       <p:pic>
         <p:nvPicPr>
-          <p:cNvPr id="57" name="Image 17" descr="preencoded.png">    </p:cNvPr>
+          <p:cNvPr id="57" name="Image 17" descr="preencoded.png"/>
           <p:cNvPicPr>
             <a:picLocks noChangeAspect="1"/>
           </p:cNvPicPr>
           <p:nvPr/>
         </p:nvPicPr>
         <p:blipFill>
-          <a:blip r:embed="rId18"/>
+          <a:blip r:embed="rId5"/>
           <a:stretch>
             <a:fillRect/>
           </a:stretch>
         </p:blipFill>
         <p:spPr>
           <a:xfrm>
-            <a:off x="2084832" y="4398264"/>
-            <a:ext cx="326161" cy="310896"/>
+            <a:off x="1866259" y="4639160"/>
+            <a:ext cx="342374" cy="326350"/>
           </a:xfrm>
           <a:prstGeom prst="rect">
             <a:avLst/>
@@ -2576,8 +1924,8 @@
         </p:nvSpPr>
         <p:spPr>
           <a:xfrm>
-            <a:off x="2502433" y="4480560"/>
-            <a:ext cx="1173455" cy="182880"/>
+            <a:off x="2304618" y="4725547"/>
+            <a:ext cx="1231785" cy="191971"/>
           </a:xfrm>
           <a:prstGeom prst="rect">
             <a:avLst/>
@@ -2589,11 +1937,11 @@
           <a:bodyPr wrap="square" lIns="0" tIns="0" rIns="0" bIns="0" rtlCol="0" anchor="ctr"/>
           <a:lstStyle/>
           <a:p>
-            <a:pPr indent="0" marL="0">
+            <a:pPr marL="0" indent="0">
               <a:buNone/>
             </a:pPr>
             <a:r>
-              <a:rPr lang="en-US" sz="950" dirty="0">
+              <a:rPr lang="en-US" sz="997" dirty="0">
                 <a:solidFill>
                   <a:srgbClr val="1A1A1A"/>
                 </a:solidFill>
@@ -2603,28 +1951,28 @@
               </a:rPr>
               <a:t>Townhouse</a:t>
             </a:r>
-            <a:endParaRPr lang="en-US" sz="950" dirty="0"/>
+            <a:endParaRPr lang="en-US" sz="997" dirty="0"/>
           </a:p>
         </p:txBody>
       </p:sp>
       <p:pic>
         <p:nvPicPr>
-          <p:cNvPr id="59" name="Image 18" descr="preencoded.png">    </p:cNvPr>
+          <p:cNvPr id="59" name="Image 18" descr="preencoded.png"/>
           <p:cNvPicPr>
             <a:picLocks noChangeAspect="1"/>
           </p:cNvPicPr>
           <p:nvPr/>
         </p:nvPicPr>
         <p:blipFill>
-          <a:blip r:embed="rId19"/>
+          <a:blip r:embed="rId4"/>
           <a:stretch>
             <a:fillRect/>
           </a:stretch>
         </p:blipFill>
         <p:spPr>
           <a:xfrm>
-            <a:off x="3712464" y="4398264"/>
-            <a:ext cx="207274" cy="310896"/>
+            <a:off x="3574798" y="4639160"/>
+            <a:ext cx="217577" cy="326350"/>
           </a:xfrm>
           <a:prstGeom prst="rect">
             <a:avLst/>
@@ -2639,8 +1987,8 @@
         </p:nvSpPr>
         <p:spPr>
           <a:xfrm>
-            <a:off x="4011178" y="4480560"/>
-            <a:ext cx="1292342" cy="182880"/>
+            <a:off x="3888360" y="4725547"/>
+            <a:ext cx="1356582" cy="191971"/>
           </a:xfrm>
           <a:prstGeom prst="rect">
             <a:avLst/>
@@ -2652,11 +2000,11 @@
           <a:bodyPr wrap="square" lIns="0" tIns="0" rIns="0" bIns="0" rtlCol="0" anchor="ctr"/>
           <a:lstStyle/>
           <a:p>
-            <a:pPr indent="0" marL="0">
+            <a:pPr marL="0" indent="0">
               <a:buNone/>
             </a:pPr>
             <a:r>
-              <a:rPr lang="en-US" sz="950" dirty="0">
+              <a:rPr lang="en-US" sz="997" dirty="0">
                 <a:solidFill>
                   <a:srgbClr val="1A1A1A"/>
                 </a:solidFill>
@@ -2666,28 +2014,28 @@
               </a:rPr>
               <a:t>Single-family home</a:t>
             </a:r>
-            <a:endParaRPr lang="en-US" sz="950" dirty="0"/>
+            <a:endParaRPr lang="en-US" sz="997" dirty="0"/>
           </a:p>
         </p:txBody>
       </p:sp>
       <p:pic>
         <p:nvPicPr>
-          <p:cNvPr id="61" name="Image 19" descr="preencoded.png">    </p:cNvPr>
+          <p:cNvPr id="61" name="Image 19" descr="preencoded.png"/>
           <p:cNvPicPr>
             <a:picLocks noChangeAspect="1"/>
           </p:cNvPicPr>
           <p:nvPr/>
         </p:nvPicPr>
         <p:blipFill>
-          <a:blip r:embed="rId20"/>
+          <a:blip r:embed="rId9"/>
           <a:stretch>
             <a:fillRect/>
           </a:stretch>
         </p:blipFill>
         <p:spPr>
           <a:xfrm>
-            <a:off x="5340096" y="4398264"/>
-            <a:ext cx="346525" cy="310896"/>
+            <a:off x="5283336" y="4639160"/>
+            <a:ext cx="363750" cy="326350"/>
           </a:xfrm>
           <a:prstGeom prst="rect">
             <a:avLst/>
@@ -2702,8 +2050,8 @@
         </p:nvSpPr>
         <p:spPr>
           <a:xfrm>
-            <a:off x="5778061" y="4480560"/>
-            <a:ext cx="1153091" cy="182880"/>
+            <a:off x="5743072" y="4725547"/>
+            <a:ext cx="1210409" cy="191971"/>
           </a:xfrm>
           <a:prstGeom prst="rect">
             <a:avLst/>
@@ -2715,11 +2063,11 @@
           <a:bodyPr wrap="square" lIns="0" tIns="0" rIns="0" bIns="0" rtlCol="0" anchor="ctr"/>
           <a:lstStyle/>
           <a:p>
-            <a:pPr indent="0" marL="0">
+            <a:pPr marL="0" indent="0">
               <a:buNone/>
             </a:pPr>
             <a:r>
-              <a:rPr lang="en-US" sz="950" dirty="0">
+              <a:rPr lang="en-US" sz="997" dirty="0">
                 <a:solidFill>
                   <a:srgbClr val="1A1A1A"/>
                 </a:solidFill>
@@ -2729,28 +2077,28 @@
               </a:rPr>
               <a:t>Office park</a:t>
             </a:r>
-            <a:endParaRPr lang="en-US" sz="950" dirty="0"/>
+            <a:endParaRPr lang="en-US" sz="997" dirty="0"/>
           </a:p>
         </p:txBody>
       </p:sp>
       <p:pic>
         <p:nvPicPr>
-          <p:cNvPr id="63" name="Image 20" descr="preencoded.png">    </p:cNvPr>
+          <p:cNvPr id="63" name="Image 20" descr="preencoded.png"/>
           <p:cNvPicPr>
             <a:picLocks noChangeAspect="1"/>
           </p:cNvPicPr>
           <p:nvPr/>
         </p:nvPicPr>
         <p:blipFill>
-          <a:blip r:embed="rId21"/>
+          <a:blip r:embed="rId7"/>
           <a:stretch>
             <a:fillRect/>
           </a:stretch>
         </p:blipFill>
         <p:spPr>
           <a:xfrm>
-            <a:off x="6967728" y="4398264"/>
-            <a:ext cx="294916" cy="310896"/>
+            <a:off x="6991875" y="4639160"/>
+            <a:ext cx="309576" cy="326350"/>
           </a:xfrm>
           <a:prstGeom prst="rect">
             <a:avLst/>
@@ -2765,8 +2113,8 @@
         </p:nvSpPr>
         <p:spPr>
           <a:xfrm>
-            <a:off x="7354084" y="4480560"/>
-            <a:ext cx="1204700" cy="182880"/>
+            <a:off x="7397436" y="4725547"/>
+            <a:ext cx="1264583" cy="191971"/>
           </a:xfrm>
           <a:prstGeom prst="rect">
             <a:avLst/>
@@ -2778,11 +2126,11 @@
           <a:bodyPr wrap="square" lIns="0" tIns="0" rIns="0" bIns="0" rtlCol="0" anchor="ctr"/>
           <a:lstStyle/>
           <a:p>
-            <a:pPr indent="0" marL="0">
+            <a:pPr marL="0" indent="0">
               <a:buNone/>
             </a:pPr>
             <a:r>
-              <a:rPr lang="en-US" sz="950" dirty="0">
+              <a:rPr lang="en-US" sz="997" dirty="0">
                 <a:solidFill>
                   <a:srgbClr val="1A1A1A"/>
                 </a:solidFill>
@@ -2792,28 +2140,28 @@
               </a:rPr>
               <a:t>Rooftop FWA CPE</a:t>
             </a:r>
-            <a:endParaRPr lang="en-US" sz="950" dirty="0"/>
+            <a:endParaRPr lang="en-US" sz="997" dirty="0"/>
           </a:p>
         </p:txBody>
       </p:sp>
       <p:pic>
         <p:nvPicPr>
-          <p:cNvPr id="65" name="Image 21" descr="preencoded.png">    </p:cNvPr>
+          <p:cNvPr id="65" name="Image 21" descr="preencoded.png"/>
           <p:cNvPicPr>
             <a:picLocks noChangeAspect="1"/>
           </p:cNvPicPr>
           <p:nvPr/>
         </p:nvPicPr>
         <p:blipFill>
-          <a:blip r:embed="rId22"/>
+          <a:blip r:embed="rId6"/>
           <a:stretch>
             <a:fillRect/>
           </a:stretch>
         </p:blipFill>
         <p:spPr>
           <a:xfrm>
-            <a:off x="8595360" y="4398264"/>
-            <a:ext cx="185481" cy="310896"/>
+            <a:off x="8700414" y="4639160"/>
+            <a:ext cx="194701" cy="326350"/>
           </a:xfrm>
           <a:prstGeom prst="rect">
             <a:avLst/>
@@ -2828,8 +2176,8 @@
         </p:nvSpPr>
         <p:spPr>
           <a:xfrm>
-            <a:off x="8872281" y="4480560"/>
-            <a:ext cx="1314135" cy="182880"/>
+            <a:off x="8991100" y="4725547"/>
+            <a:ext cx="1379458" cy="191971"/>
           </a:xfrm>
           <a:prstGeom prst="rect">
             <a:avLst/>
@@ -2841,11 +2189,11 @@
           <a:bodyPr wrap="square" lIns="0" tIns="0" rIns="0" bIns="0" rtlCol="0" anchor="ctr"/>
           <a:lstStyle/>
           <a:p>
-            <a:pPr indent="0" marL="0">
+            <a:pPr marL="0" indent="0">
               <a:buNone/>
             </a:pPr>
             <a:r>
-              <a:rPr lang="en-US" sz="950" dirty="0">
+              <a:rPr lang="en-US" sz="997" dirty="0">
                 <a:solidFill>
                   <a:srgbClr val="1A1A1A"/>
                 </a:solidFill>
@@ -2855,28 +2203,28 @@
               </a:rPr>
               <a:t>Pedestrian UE</a:t>
             </a:r>
-            <a:endParaRPr lang="en-US" sz="950" dirty="0"/>
+            <a:endParaRPr lang="en-US" sz="997" dirty="0"/>
           </a:p>
         </p:txBody>
       </p:sp>
       <p:pic>
         <p:nvPicPr>
-          <p:cNvPr id="67" name="Image 22" descr="preencoded.png">    </p:cNvPr>
+          <p:cNvPr id="67" name="Image 22" descr="preencoded.png"/>
           <p:cNvPicPr>
             <a:picLocks noChangeAspect="1"/>
           </p:cNvPicPr>
           <p:nvPr/>
         </p:nvPicPr>
         <p:blipFill>
-          <a:blip r:embed="rId23"/>
+          <a:blip r:embed="rId10"/>
           <a:stretch>
             <a:fillRect/>
           </a:stretch>
         </p:blipFill>
         <p:spPr>
           <a:xfrm>
-            <a:off x="10222992" y="4398264"/>
-            <a:ext cx="570774" cy="310896"/>
+            <a:off x="10408952" y="4639160"/>
+            <a:ext cx="599146" cy="326350"/>
           </a:xfrm>
           <a:prstGeom prst="rect">
             <a:avLst/>
@@ -2891,8 +2239,8 @@
         </p:nvSpPr>
         <p:spPr>
           <a:xfrm>
-            <a:off x="10885206" y="4480560"/>
-            <a:ext cx="928842" cy="182880"/>
+            <a:off x="11104084" y="4725547"/>
+            <a:ext cx="975013" cy="191971"/>
           </a:xfrm>
           <a:prstGeom prst="rect">
             <a:avLst/>
@@ -2904,11 +2252,11 @@
           <a:bodyPr wrap="square" lIns="0" tIns="0" rIns="0" bIns="0" rtlCol="0" anchor="ctr"/>
           <a:lstStyle/>
           <a:p>
-            <a:pPr indent="0" marL="0">
+            <a:pPr marL="0" indent="0">
               <a:buNone/>
             </a:pPr>
             <a:r>
-              <a:rPr lang="en-US" sz="950" dirty="0">
+              <a:rPr lang="en-US" sz="997" dirty="0">
                 <a:solidFill>
                   <a:srgbClr val="1A1A1A"/>
                 </a:solidFill>
@@ -2918,7 +2266,7 @@
               </a:rPr>
               <a:t>In-car UE</a:t>
             </a:r>
-            <a:endParaRPr lang="en-US" sz="950" dirty="0"/>
+            <a:endParaRPr lang="en-US" sz="997" dirty="0"/>
           </a:p>
         </p:txBody>
       </p:sp>
@@ -3223,4 +2571,319 @@
     </a:ext>
   </a:extLst>
 </a:theme>
+</file>
+
+<file path=ppt/theme/theme2.xml><?xml version="1.0" encoding="utf-8"?>
+<a:theme xmlns:a="http://schemas.openxmlformats.org/drawingml/2006/main" name="Office Theme">
+  <a:themeElements>
+    <a:clrScheme name="Office">
+      <a:dk1>
+        <a:sysClr val="windowText" lastClr="000000"/>
+      </a:dk1>
+      <a:lt1>
+        <a:sysClr val="window" lastClr="FFFFFF"/>
+      </a:lt1>
+      <a:dk2>
+        <a:srgbClr val="0E2841"/>
+      </a:dk2>
+      <a:lt2>
+        <a:srgbClr val="E8E8E8"/>
+      </a:lt2>
+      <a:accent1>
+        <a:srgbClr val="156082"/>
+      </a:accent1>
+      <a:accent2>
+        <a:srgbClr val="E97132"/>
+      </a:accent2>
+      <a:accent3>
+        <a:srgbClr val="196B24"/>
+      </a:accent3>
+      <a:accent4>
+        <a:srgbClr val="0F9ED5"/>
+      </a:accent4>
+      <a:accent5>
+        <a:srgbClr val="A02B93"/>
+      </a:accent5>
+      <a:accent6>
+        <a:srgbClr val="4EA72E"/>
+      </a:accent6>
+      <a:hlink>
+        <a:srgbClr val="467886"/>
+      </a:hlink>
+      <a:folHlink>
+        <a:srgbClr val="96607D"/>
+      </a:folHlink>
+    </a:clrScheme>
+    <a:fontScheme name="Office">
+      <a:majorFont>
+        <a:latin typeface="Aptos Display" panose="02110004020202020204"/>
+        <a:ea typeface=""/>
+        <a:cs typeface=""/>
+        <a:font script="Jpan" typeface="游ゴシック Light"/>
+        <a:font script="Hang" typeface="맑은 고딕"/>
+        <a:font script="Hans" typeface="等线 Light"/>
+        <a:font script="Hant" typeface="新細明體"/>
+        <a:font script="Arab" typeface="Times New Roman"/>
+        <a:font script="Hebr" typeface="Times New Roman"/>
+        <a:font script="Thai" typeface="Angsana New"/>
+        <a:font script="Ethi" typeface="Nyala"/>
+        <a:font script="Beng" typeface="Vrinda"/>
+        <a:font script="Gujr" typeface="Shruti"/>
+        <a:font script="Khmr" typeface="MoolBoran"/>
+        <a:font script="Knda" typeface="Tunga"/>
+        <a:font script="Guru" typeface="Raavi"/>
+        <a:font script="Cans" typeface="Euphemia"/>
+        <a:font script="Cher" typeface="Plantagenet Cherokee"/>
+        <a:font script="Yiii" typeface="Microsoft Yi Baiti"/>
+        <a:font script="Tibt" typeface="Microsoft Himalaya"/>
+        <a:font script="Thaa" typeface="MV Boli"/>
+        <a:font script="Deva" typeface="Mangal"/>
+        <a:font script="Telu" typeface="Gautami"/>
+        <a:font script="Taml" typeface="Latha"/>
+        <a:font script="Syrc" typeface="Estrangelo Edessa"/>
+        <a:font script="Orya" typeface="Kalinga"/>
+        <a:font script="Mlym" typeface="Kartika"/>
+        <a:font script="Laoo" typeface="DokChampa"/>
+        <a:font script="Sinh" typeface="Iskoola Pota"/>
+        <a:font script="Mong" typeface="Mongolian Baiti"/>
+        <a:font script="Viet" typeface="Times New Roman"/>
+        <a:font script="Uigh" typeface="Microsoft Uighur"/>
+        <a:font script="Geor" typeface="Sylfaen"/>
+        <a:font script="Armn" typeface="Arial"/>
+        <a:font script="Bugi" typeface="Leelawadee UI"/>
+        <a:font script="Bopo" typeface="Microsoft JhengHei"/>
+        <a:font script="Java" typeface="Javanese Text"/>
+        <a:font script="Lisu" typeface="Segoe UI"/>
+        <a:font script="Mymr" typeface="Myanmar Text"/>
+        <a:font script="Nkoo" typeface="Ebrima"/>
+        <a:font script="Olck" typeface="Nirmala UI"/>
+        <a:font script="Osma" typeface="Ebrima"/>
+        <a:font script="Phag" typeface="Phagspa"/>
+        <a:font script="Syrn" typeface="Estrangelo Edessa"/>
+        <a:font script="Syrj" typeface="Estrangelo Edessa"/>
+        <a:font script="Syre" typeface="Estrangelo Edessa"/>
+        <a:font script="Sora" typeface="Nirmala UI"/>
+        <a:font script="Tale" typeface="Microsoft Tai Le"/>
+        <a:font script="Talu" typeface="Microsoft New Tai Lue"/>
+        <a:font script="Tfng" typeface="Ebrima"/>
+      </a:majorFont>
+      <a:minorFont>
+        <a:latin typeface="Aptos" panose="02110004020202020204"/>
+        <a:ea typeface=""/>
+        <a:cs typeface=""/>
+        <a:font script="Jpan" typeface="游ゴシック"/>
+        <a:font script="Hang" typeface="맑은 고딕"/>
+        <a:font script="Hans" typeface="等线"/>
+        <a:font script="Hant" typeface="新細明體"/>
+        <a:font script="Arab" typeface="Arial"/>
+        <a:font script="Hebr" typeface="Arial"/>
+        <a:font script="Thai" typeface="Cordia New"/>
+        <a:font script="Ethi" typeface="Nyala"/>
+        <a:font script="Beng" typeface="Vrinda"/>
+        <a:font script="Gujr" typeface="Shruti"/>
+        <a:font script="Khmr" typeface="DaunPenh"/>
+        <a:font script="Knda" typeface="Tunga"/>
+        <a:font script="Guru" typeface="Raavi"/>
+        <a:font script="Cans" typeface="Euphemia"/>
+        <a:font script="Cher" typeface="Plantagenet Cherokee"/>
+        <a:font script="Yiii" typeface="Microsoft Yi Baiti"/>
+        <a:font script="Tibt" typeface="Microsoft Himalaya"/>
+        <a:font script="Thaa" typeface="MV Boli"/>
+        <a:font script="Deva" typeface="Mangal"/>
+        <a:font script="Telu" typeface="Gautami"/>
+        <a:font script="Taml" typeface="Latha"/>
+        <a:font script="Syrc" typeface="Estrangelo Edessa"/>
+        <a:font script="Orya" typeface="Kalinga"/>
+        <a:font script="Mlym" typeface="Kartika"/>
+        <a:font script="Laoo" typeface="DokChampa"/>
+        <a:font script="Sinh" typeface="Iskoola Pota"/>
+        <a:font script="Mong" typeface="Mongolian Baiti"/>
+        <a:font script="Viet" typeface="Arial"/>
+        <a:font script="Uigh" typeface="Microsoft Uighur"/>
+        <a:font script="Geor" typeface="Sylfaen"/>
+        <a:font script="Armn" typeface="Arial"/>
+        <a:font script="Bugi" typeface="Leelawadee UI"/>
+        <a:font script="Bopo" typeface="Microsoft JhengHei"/>
+        <a:font script="Java" typeface="Javanese Text"/>
+        <a:font script="Lisu" typeface="Segoe UI"/>
+        <a:font script="Mymr" typeface="Myanmar Text"/>
+        <a:font script="Nkoo" typeface="Ebrima"/>
+        <a:font script="Olck" typeface="Nirmala UI"/>
+        <a:font script="Osma" typeface="Ebrima"/>
+        <a:font script="Phag" typeface="Phagspa"/>
+        <a:font script="Syrn" typeface="Estrangelo Edessa"/>
+        <a:font script="Syrj" typeface="Estrangelo Edessa"/>
+        <a:font script="Syre" typeface="Estrangelo Edessa"/>
+        <a:font script="Sora" typeface="Nirmala UI"/>
+        <a:font script="Tale" typeface="Microsoft Tai Le"/>
+        <a:font script="Talu" typeface="Microsoft New Tai Lue"/>
+        <a:font script="Tfng" typeface="Ebrima"/>
+      </a:minorFont>
+    </a:fontScheme>
+    <a:fmtScheme name="Office">
+      <a:fillStyleLst>
+        <a:solidFill>
+          <a:schemeClr val="phClr"/>
+        </a:solidFill>
+        <a:gradFill rotWithShape="1">
+          <a:gsLst>
+            <a:gs pos="0">
+              <a:schemeClr val="phClr">
+                <a:lumMod val="110000"/>
+                <a:satMod val="105000"/>
+                <a:tint val="67000"/>
+              </a:schemeClr>
+            </a:gs>
+            <a:gs pos="50000">
+              <a:schemeClr val="phClr">
+                <a:lumMod val="105000"/>
+                <a:satMod val="103000"/>
+                <a:tint val="73000"/>
+              </a:schemeClr>
+            </a:gs>
+            <a:gs pos="100000">
+              <a:schemeClr val="phClr">
+                <a:lumMod val="105000"/>
+                <a:satMod val="109000"/>
+                <a:tint val="81000"/>
+              </a:schemeClr>
+            </a:gs>
+          </a:gsLst>
+          <a:lin ang="5400000" scaled="0"/>
+        </a:gradFill>
+        <a:gradFill rotWithShape="1">
+          <a:gsLst>
+            <a:gs pos="0">
+              <a:schemeClr val="phClr">
+                <a:satMod val="103000"/>
+                <a:lumMod val="102000"/>
+                <a:tint val="94000"/>
+              </a:schemeClr>
+            </a:gs>
+            <a:gs pos="50000">
+              <a:schemeClr val="phClr">
+                <a:satMod val="110000"/>
+                <a:lumMod val="100000"/>
+                <a:shade val="100000"/>
+              </a:schemeClr>
+            </a:gs>
+            <a:gs pos="100000">
+              <a:schemeClr val="phClr">
+                <a:lumMod val="99000"/>
+                <a:satMod val="120000"/>
+                <a:shade val="78000"/>
+              </a:schemeClr>
+            </a:gs>
+          </a:gsLst>
+          <a:lin ang="5400000" scaled="0"/>
+        </a:gradFill>
+      </a:fillStyleLst>
+      <a:lnStyleLst>
+        <a:ln w="12700" cap="flat" cmpd="sng" algn="ctr">
+          <a:solidFill>
+            <a:schemeClr val="phClr"/>
+          </a:solidFill>
+          <a:prstDash val="solid"/>
+          <a:miter lim="800000"/>
+        </a:ln>
+        <a:ln w="19050" cap="flat" cmpd="sng" algn="ctr">
+          <a:solidFill>
+            <a:schemeClr val="phClr"/>
+          </a:solidFill>
+          <a:prstDash val="solid"/>
+          <a:miter lim="800000"/>
+        </a:ln>
+        <a:ln w="25400" cap="flat" cmpd="sng" algn="ctr">
+          <a:solidFill>
+            <a:schemeClr val="phClr"/>
+          </a:solidFill>
+          <a:prstDash val="solid"/>
+          <a:miter lim="800000"/>
+        </a:ln>
+      </a:lnStyleLst>
+      <a:effectStyleLst>
+        <a:effectStyle>
+          <a:effectLst/>
+        </a:effectStyle>
+        <a:effectStyle>
+          <a:effectLst/>
+        </a:effectStyle>
+        <a:effectStyle>
+          <a:effectLst>
+            <a:outerShdw blurRad="57150" dist="19050" dir="5400000" algn="ctr" rotWithShape="0">
+              <a:srgbClr val="000000">
+                <a:alpha val="63000"/>
+              </a:srgbClr>
+            </a:outerShdw>
+          </a:effectLst>
+        </a:effectStyle>
+      </a:effectStyleLst>
+      <a:bgFillStyleLst>
+        <a:solidFill>
+          <a:schemeClr val="phClr"/>
+        </a:solidFill>
+        <a:solidFill>
+          <a:schemeClr val="phClr">
+            <a:tint val="95000"/>
+            <a:satMod val="170000"/>
+          </a:schemeClr>
+        </a:solidFill>
+        <a:gradFill rotWithShape="1">
+          <a:gsLst>
+            <a:gs pos="0">
+              <a:schemeClr val="phClr">
+                <a:tint val="93000"/>
+                <a:satMod val="150000"/>
+                <a:shade val="98000"/>
+                <a:lumMod val="102000"/>
+              </a:schemeClr>
+            </a:gs>
+            <a:gs pos="50000">
+              <a:schemeClr val="phClr">
+                <a:tint val="98000"/>
+                <a:satMod val="130000"/>
+                <a:shade val="90000"/>
+                <a:lumMod val="103000"/>
+              </a:schemeClr>
+            </a:gs>
+            <a:gs pos="100000">
+              <a:schemeClr val="phClr">
+                <a:shade val="63000"/>
+                <a:satMod val="120000"/>
+              </a:schemeClr>
+            </a:gs>
+          </a:gsLst>
+          <a:lin ang="5400000" scaled="0"/>
+        </a:gradFill>
+      </a:bgFillStyleLst>
+    </a:fmtScheme>
+  </a:themeElements>
+  <a:objectDefaults>
+    <a:lnDef>
+      <a:spPr/>
+      <a:bodyPr/>
+      <a:lstStyle/>
+      <a:style>
+        <a:lnRef idx="2">
+          <a:schemeClr val="accent1"/>
+        </a:lnRef>
+        <a:fillRef idx="0">
+          <a:schemeClr val="accent1"/>
+        </a:fillRef>
+        <a:effectRef idx="1">
+          <a:schemeClr val="accent1"/>
+        </a:effectRef>
+        <a:fontRef idx="minor">
+          <a:schemeClr val="tx1"/>
+        </a:fontRef>
+      </a:style>
+    </a:lnDef>
+  </a:objectDefaults>
+  <a:extraClrSchemeLst/>
+  <a:extLst>
+    <a:ext uri="{05A4C25C-085E-4340-85A3-A5531E510DB2}">
+      <thm15:themeFamily xmlns:thm15="http://schemas.microsoft.com/office/thememl/2012/main" name="Office Theme" id="{2E142A2C-CD16-42D6-873A-C26D2A0506FA}" vid="{1BDDFF52-6CD6-40A5-AB3C-68EB2F1E4D0A}"/>
+    </a:ext>
+  </a:extLst>
+</a:theme>
 </file>